--- a/Report/FundOptG5.pptx
+++ b/Report/FundOptG5.pptx
@@ -252,7 +252,7 @@
           <a:p>
             <a:fld id="{48B45424-6BAC-416C-8F6C-5F9DE854A36B}" type="datetimeFigureOut">
               <a:rPr lang="en-US" smtClean="0"/>
-              <a:t>6/22/2026</a:t>
+              <a:t>6/23/2026</a:t>
             </a:fld>
             <a:endParaRPr lang="en-US"/>
           </a:p>
@@ -430,7 +430,7 @@
           <a:p>
             <a:fld id="{6B733702-C25A-40B9-9167-54BAA79B29B0}" type="datetimeFigureOut">
               <a:rPr lang="en-US" smtClean="0"/>
-              <a:t>6/22/2026</a:t>
+              <a:t>6/23/2026</a:t>
             </a:fld>
             <a:endParaRPr lang="en-US"/>
           </a:p>
@@ -816,7 +816,7 @@
             <a:fld id="{F70EAA40-3A53-4A3D-924A-D38F1059C7D5}" type="datetime1">
               <a:rPr lang="en-US" smtClean="0"/>
               <a:pPr/>
-              <a:t>6/22/2026</a:t>
+              <a:t>6/23/2026</a:t>
             </a:fld>
             <a:endParaRPr lang="en-US"/>
           </a:p>
@@ -1399,7 +1399,7 @@
             <a:fld id="{F70EAA40-3A53-4A3D-924A-D38F1059C7D5}" type="datetime1">
               <a:rPr lang="en-US" smtClean="0"/>
               <a:pPr/>
-              <a:t>6/22/2026</a:t>
+              <a:t>6/23/2026</a:t>
             </a:fld>
             <a:endParaRPr lang="en-US"/>
           </a:p>
@@ -1585,7 +1585,7 @@
             <a:fld id="{F70EAA40-3A53-4A3D-924A-D38F1059C7D5}" type="datetime1">
               <a:rPr lang="en-US" smtClean="0"/>
               <a:pPr/>
-              <a:t>6/22/2026</a:t>
+              <a:t>6/23/2026</a:t>
             </a:fld>
             <a:endParaRPr lang="en-US"/>
           </a:p>
@@ -1921,7 +1921,7 @@
             <a:fld id="{F70EAA40-3A53-4A3D-924A-D38F1059C7D5}" type="datetime1">
               <a:rPr lang="en-US" smtClean="0"/>
               <a:pPr/>
-              <a:t>6/22/2026</a:t>
+              <a:t>6/23/2026</a:t>
             </a:fld>
             <a:endParaRPr lang="en-US"/>
           </a:p>
@@ -2242,7 +2242,7 @@
             <a:fld id="{F70EAA40-3A53-4A3D-924A-D38F1059C7D5}" type="datetime1">
               <a:rPr lang="en-US" smtClean="0"/>
               <a:pPr/>
-              <a:t>6/22/2026</a:t>
+              <a:t>6/23/2026</a:t>
             </a:fld>
             <a:endParaRPr lang="en-US"/>
           </a:p>
@@ -2576,7 +2576,7 @@
             <a:fld id="{F70EAA40-3A53-4A3D-924A-D38F1059C7D5}" type="datetime1">
               <a:rPr lang="en-US" smtClean="0"/>
               <a:pPr/>
-              <a:t>6/22/2026</a:t>
+              <a:t>6/23/2026</a:t>
             </a:fld>
             <a:endParaRPr lang="en-US"/>
           </a:p>
@@ -3011,7 +3011,7 @@
             <a:fld id="{F70EAA40-3A53-4A3D-924A-D38F1059C7D5}" type="datetime1">
               <a:rPr lang="en-US" smtClean="0"/>
               <a:pPr/>
-              <a:t>6/22/2026</a:t>
+              <a:t>6/23/2026</a:t>
             </a:fld>
             <a:endParaRPr lang="en-US"/>
           </a:p>
@@ -3345,7 +3345,7 @@
             <a:fld id="{F70EAA40-3A53-4A3D-924A-D38F1059C7D5}" type="datetime1">
               <a:rPr lang="en-US" smtClean="0"/>
               <a:pPr/>
-              <a:t>6/22/2026</a:t>
+              <a:t>6/23/2026</a:t>
             </a:fld>
             <a:endParaRPr lang="en-US"/>
           </a:p>
@@ -3930,7 +3930,7 @@
             <a:fld id="{F70EAA40-3A53-4A3D-924A-D38F1059C7D5}" type="datetime1">
               <a:rPr lang="en-US" smtClean="0"/>
               <a:pPr/>
-              <a:t>6/22/2026</a:t>
+              <a:t>6/23/2026</a:t>
             </a:fld>
             <a:endParaRPr lang="en-US"/>
           </a:p>
@@ -4367,7 +4367,7 @@
             <a:fld id="{F70EAA40-3A53-4A3D-924A-D38F1059C7D5}" type="datetime1">
               <a:rPr lang="en-US" smtClean="0"/>
               <a:pPr/>
-              <a:t>6/22/2026</a:t>
+              <a:t>6/23/2026</a:t>
             </a:fld>
             <a:endParaRPr lang="en-US"/>
           </a:p>
@@ -5259,8 +5259,8 @@
           </a:p>
         </p:txBody>
       </p:sp>
-      <mc:AlternateContent xmlns:mc="http://schemas.openxmlformats.org/markup-compatibility/2006">
-        <mc:Choice xmlns:a14="http://schemas.microsoft.com/office/drawing/2010/main" Requires="a14">
+      <mc:AlternateContent xmlns:mc="http://schemas.openxmlformats.org/markup-compatibility/2006" xmlns:a14="http://schemas.microsoft.com/office/drawing/2010/main">
+        <mc:Choice Requires="a14">
           <p:sp>
             <p:nvSpPr>
               <p:cNvPr id="3" name="Content"/>
@@ -5627,7 +5627,7 @@
             </p:txBody>
           </p:sp>
         </mc:Choice>
-        <mc:Fallback>
+        <mc:Fallback xmlns="">
           <p:sp>
             <p:nvSpPr>
               <p:cNvPr id="3" name="Content"/>
@@ -6192,8 +6192,8 @@
           </a:p>
         </p:txBody>
       </p:sp>
-      <mc:AlternateContent xmlns:mc="http://schemas.openxmlformats.org/markup-compatibility/2006">
-        <mc:Choice xmlns:a14="http://schemas.microsoft.com/office/drawing/2010/main" Requires="a14">
+      <mc:AlternateContent xmlns:mc="http://schemas.openxmlformats.org/markup-compatibility/2006" xmlns:a14="http://schemas.microsoft.com/office/drawing/2010/main">
+        <mc:Choice Requires="a14">
           <p:sp>
             <p:nvSpPr>
               <p:cNvPr id="3" name="Content"/>
@@ -6605,7 +6605,7 @@
             </p:txBody>
           </p:sp>
         </mc:Choice>
-        <mc:Fallback>
+        <mc:Fallback xmlns="">
           <p:sp>
             <p:nvSpPr>
               <p:cNvPr id="3" name="Content"/>
@@ -7838,9 +7838,10 @@
           <a:lstStyle/>
           <a:p>
             <a:r>
-              <a:rPr lang="en-US" sz="2600" dirty="0"/>
-              <a:t>5.1 Background &amp; Key Improvements</a:t>
-            </a:r>
+              <a:rPr lang="en-US" sz="2600"/>
+              <a:t>5.1 Background</a:t>
+            </a:r>
+            <a:endParaRPr lang="en-US" sz="2600" dirty="0"/>
           </a:p>
         </p:txBody>
       </p:sp>
@@ -7863,7 +7864,7 @@
               <a:buNone/>
             </a:pPr>
             <a:r>
-              <a:rPr lang="en-US" sz="1400" b="1" dirty="0"/>
+              <a:rPr lang="en-US" sz="1600" b="1" dirty="0"/>
               <a:t>CP with AddCircuit — Mathematically Guaranteed Solutions</a:t>
             </a:r>
           </a:p>
@@ -7872,7 +7873,7 @@
               <a:buNone/>
             </a:pPr>
             <a:r>
-              <a:rPr lang="en-US" sz="1400" b="0" dirty="0"/>
+              <a:rPr lang="en-US" sz="1600" b="0" dirty="0"/>
               <a:t>Provides provably correct solutions for small instances of the BSRM problem.</a:t>
             </a:r>
           </a:p>
@@ -7880,74 +7881,20 @@
             <a:pPr marL="0" indent="0">
               <a:buNone/>
             </a:pPr>
-            <a:endParaRPr lang="en-US" sz="1400" b="0" dirty="0"/>
-          </a:p>
-          <a:p>
-            <a:pPr marL="0" indent="0">
-              <a:buNone/>
-            </a:pPr>
-            <a:r>
-              <a:rPr lang="en-US" sz="1400" b="1" dirty="0"/>
-              <a:t>Key improvements over original MTZ-based formulation:</a:t>
-            </a:r>
-          </a:p>
-          <a:p>
-            <a:pPr marL="457200" indent="-457200">
-              <a:buNone/>
-            </a:pPr>
-            <a:r>
-              <a:rPr lang="en-US" sz="1400" b="0" dirty="0"/>
-              <a:t>• Use BoolVar instead of IntVar(0,1) for routing variables</a:t>
-            </a:r>
-          </a:p>
-          <a:p>
-            <a:pPr marL="457200" indent="-457200">
-              <a:buNone/>
-            </a:pPr>
-            <a:r>
-              <a:rPr lang="en-US" sz="1400" b="0" dirty="0"/>
-              <a:t>• Tighten domain bounds of y[k] and z</a:t>
-            </a:r>
-          </a:p>
-          <a:p>
-            <a:pPr marL="457200" indent="-457200">
-              <a:buNone/>
-            </a:pPr>
-            <a:r>
-              <a:rPr lang="en-US" sz="1400" b="0" dirty="0"/>
-              <a:t>• Replace THREE separate constraint groups with a SINGLE AddCircuit call per technician:</a:t>
-            </a:r>
-          </a:p>
-          <a:p>
-            <a:pPr marL="914400" indent="-457200">
-              <a:buNone/>
-            </a:pPr>
-            <a:r>
-              <a:rPr lang="en-US" sz="1400" b="0" dirty="0"/>
-              <a:t>  (Flow conservation  +  Depot constraints  +  MTZ subtour elimination)</a:t>
-            </a:r>
-          </a:p>
-          <a:p>
-            <a:pPr marL="457200" indent="-457200">
-              <a:buNone/>
-            </a:pPr>
-            <a:r>
-              <a:rPr lang="en-US" sz="1400" b="0" dirty="0"/>
-              <a:t>• Result: significantly faster for small instances via efficient internal propagator</a:t>
-            </a:r>
-          </a:p>
-          <a:p>
-            <a:pPr marL="0" indent="0">
-              <a:buNone/>
-            </a:pPr>
-            <a:endParaRPr lang="en-US" sz="1400" b="0" dirty="0"/>
-          </a:p>
-          <a:p>
-            <a:pPr marL="0" indent="0">
-              <a:buNone/>
-            </a:pPr>
-            <a:r>
-              <a:rPr lang="en-US" sz="1400" b="1" dirty="0">
+            <a:endParaRPr lang="en-US" sz="1600" b="0" dirty="0"/>
+          </a:p>
+          <a:p>
+            <a:pPr marL="0" indent="0">
+              <a:buNone/>
+            </a:pPr>
+            <a:endParaRPr lang="en-US" sz="1600" b="0" dirty="0"/>
+          </a:p>
+          <a:p>
+            <a:pPr marL="0" indent="0">
+              <a:buNone/>
+            </a:pPr>
+            <a:r>
+              <a:rPr lang="en-US" sz="1600" b="1" dirty="0">
                 <a:solidFill>
                   <a:srgbClr val="C00000"/>
                 </a:solidFill>
@@ -7960,7 +7907,7 @@
               <a:buNone/>
             </a:pPr>
             <a:r>
-              <a:rPr lang="en-US" sz="1400" b="0" dirty="0"/>
+              <a:rPr lang="en-US" sz="1600" b="0" dirty="0"/>
               <a:t>O(K × N²) variable count means CP CANNOT scale to large inputs.</a:t>
             </a:r>
           </a:p>
@@ -7969,7 +7916,7 @@
               <a:buNone/>
             </a:pPr>
             <a:r>
-              <a:rPr lang="en-US" sz="1400" b="0" dirty="0"/>
+              <a:rPr lang="en-US" sz="1600" b="0" dirty="0"/>
               <a:t>This is not an implementation failure — it is a theoretical boundary.</a:t>
             </a:r>
           </a:p>
@@ -7978,7 +7925,7 @@
               <a:buNone/>
             </a:pPr>
             <a:r>
-              <a:rPr lang="en-US" sz="1400" b="0" dirty="0"/>
+              <a:rPr lang="en-US" sz="1600" b="0" dirty="0"/>
               <a:t>VRP is NP-Hard: any exact formulation requires variables growing quadratically with N.</a:t>
             </a:r>
           </a:p>
@@ -7987,12 +7934,12 @@
               <a:buNone/>
             </a:pPr>
             <a:r>
-              <a:rPr lang="en-US" sz="1400" b="0" dirty="0"/>
+              <a:rPr lang="en-US" sz="1600" b="0" dirty="0"/>
               <a:t>CP is most valuable as a benchmark producing provably correct solutions for small cases.</a:t>
             </a:r>
           </a:p>
           <a:p>
-            <a:endParaRPr lang="en-US" sz="1400" dirty="0"/>
+            <a:endParaRPr lang="en-US" sz="1600" dirty="0"/>
           </a:p>
         </p:txBody>
       </p:sp>
@@ -8065,7 +8012,7 @@
               <a:buNone/>
             </a:pPr>
             <a:r>
-              <a:rPr lang="en-US" sz="1400" b="1" dirty="0"/>
+              <a:rPr lang="en-US" sz="1600" b="1" dirty="0"/>
               <a:t>Step 1: Model the Problem</a:t>
             </a:r>
           </a:p>
@@ -8077,7 +8024,7 @@
               <a:buNone/>
             </a:pPr>
             <a:r>
-              <a:rPr lang="en-US" sz="1400" b="0" dirty="0"/>
+              <a:rPr lang="en-US" sz="1600" b="0" dirty="0"/>
               <a:t>Define decision variables, their domains, and all constraints.</a:t>
             </a:r>
           </a:p>
@@ -8088,7 +8035,7 @@
               </a:spcBef>
               <a:buNone/>
             </a:pPr>
-            <a:endParaRPr lang="en-US" sz="1400" b="0" dirty="0"/>
+            <a:endParaRPr lang="en-US" sz="1600" b="0" dirty="0"/>
           </a:p>
           <a:p>
             <a:pPr marL="0" indent="0">
@@ -8098,7 +8045,7 @@
               <a:buNone/>
             </a:pPr>
             <a:r>
-              <a:rPr lang="en-US" sz="1400" b="1" dirty="0"/>
+              <a:rPr lang="en-US" sz="1600" b="1" dirty="0"/>
               <a:t>Step 2: Propagate Constraints</a:t>
             </a:r>
           </a:p>
@@ -8110,7 +8057,7 @@
               <a:buNone/>
             </a:pPr>
             <a:r>
-              <a:rPr lang="en-US" sz="1400" b="0" dirty="0"/>
+              <a:rPr lang="en-US" sz="1600" b="0" dirty="0"/>
               <a:t>Reduce variable domains by eliminating impossible values.</a:t>
             </a:r>
           </a:p>
@@ -8122,7 +8069,7 @@
               <a:buNone/>
             </a:pPr>
             <a:r>
-              <a:rPr lang="en-US" sz="1400" b="0" dirty="0"/>
+              <a:rPr lang="en-US" sz="1600" b="0" dirty="0"/>
               <a:t>Techniques: domain consistency, bound consistency.</a:t>
             </a:r>
           </a:p>
@@ -8133,7 +8080,7 @@
               </a:spcBef>
               <a:buNone/>
             </a:pPr>
-            <a:endParaRPr lang="en-US" sz="1400" b="0" dirty="0"/>
+            <a:endParaRPr lang="en-US" sz="1600" b="0" dirty="0"/>
           </a:p>
           <a:p>
             <a:pPr marL="0" indent="0">
@@ -8143,7 +8090,7 @@
               <a:buNone/>
             </a:pPr>
             <a:r>
-              <a:rPr lang="en-US" sz="1400" b="1" dirty="0"/>
+              <a:rPr lang="en-US" sz="1600" b="1" dirty="0"/>
               <a:t>Step 3: Search Systematically</a:t>
             </a:r>
           </a:p>
@@ -8155,7 +8102,7 @@
               <a:buNone/>
             </a:pPr>
             <a:r>
-              <a:rPr lang="en-US" sz="1400" b="0" dirty="0"/>
+              <a:rPr lang="en-US" sz="1600" b="0" dirty="0"/>
               <a:t>Assign values to variables (branching).</a:t>
             </a:r>
           </a:p>
@@ -8167,7 +8114,7 @@
               <a:buNone/>
             </a:pPr>
             <a:r>
-              <a:rPr lang="en-US" sz="1400" b="0" dirty="0"/>
+              <a:rPr lang="en-US" sz="1600" b="0" dirty="0"/>
               <a:t>Backtrack when constraints are violated.</a:t>
             </a:r>
           </a:p>
@@ -8179,7 +8126,7 @@
               <a:buNone/>
             </a:pPr>
             <a:r>
-              <a:rPr lang="en-US" sz="1400" b="0" dirty="0"/>
+              <a:rPr lang="en-US" sz="1600" b="0" dirty="0"/>
               <a:t>Use heuristics to guide variable/value selection.</a:t>
             </a:r>
           </a:p>
@@ -8190,7 +8137,7 @@
               </a:spcBef>
               <a:buNone/>
             </a:pPr>
-            <a:endParaRPr lang="en-US" sz="1400" b="0" dirty="0"/>
+            <a:endParaRPr lang="en-US" sz="1600" b="0" dirty="0"/>
           </a:p>
           <a:p>
             <a:pPr marL="0" indent="0">
@@ -8200,7 +8147,7 @@
               <a:buNone/>
             </a:pPr>
             <a:r>
-              <a:rPr lang="en-US" sz="1400" b="1" dirty="0"/>
+              <a:rPr lang="en-US" sz="1600" b="1" dirty="0"/>
               <a:t>Step 4: Optimize</a:t>
             </a:r>
           </a:p>
@@ -8212,7 +8159,7 @@
               <a:buNone/>
             </a:pPr>
             <a:r>
-              <a:rPr lang="en-US" sz="1400" b="0" dirty="0"/>
+              <a:rPr lang="en-US" sz="1600" b="0" dirty="0"/>
               <a:t>Tighten bounds iteratively to find the best solution within the time limit.</a:t>
             </a:r>
           </a:p>
@@ -8223,7 +8170,7 @@
               </a:spcBef>
               <a:buNone/>
             </a:pPr>
-            <a:endParaRPr lang="en-US" sz="1400" b="0" dirty="0"/>
+            <a:endParaRPr lang="en-US" sz="1600" b="0" dirty="0"/>
           </a:p>
           <a:p>
             <a:pPr marL="0" indent="0">
@@ -8233,7 +8180,7 @@
               <a:buNone/>
             </a:pPr>
             <a:r>
-              <a:rPr lang="en-US" sz="1400" b="1" dirty="0"/>
+              <a:rPr lang="en-US" sz="1600" b="1" dirty="0"/>
               <a:t>Solver configuration used:</a:t>
             </a:r>
           </a:p>
@@ -8245,24 +8192,24 @@
               <a:buNone/>
             </a:pPr>
             <a:r>
-              <a:rPr lang="en-US" sz="1400" b="0" dirty="0">
+              <a:rPr lang="en-US" sz="1600" b="0" dirty="0">
                 <a:latin typeface="Courier New"/>
               </a:rPr>
               <a:t>  solver.parameters.max_time_in_seconds </a:t>
             </a:r>
             <a:r>
-              <a:rPr lang="en-US" sz="1400" b="0">
+              <a:rPr lang="en-US" sz="1600" b="0">
                 <a:latin typeface="Courier New"/>
               </a:rPr>
               <a:t>= </a:t>
             </a:r>
             <a:r>
-              <a:rPr lang="en-US" sz="1400">
+              <a:rPr lang="en-US" sz="1600">
                 <a:latin typeface="Courier New"/>
               </a:rPr>
               <a:t>100.0</a:t>
             </a:r>
-            <a:endParaRPr lang="en-US" sz="1400" b="0" dirty="0">
+            <a:endParaRPr lang="en-US" sz="1600" b="0" dirty="0">
               <a:latin typeface="Courier New"/>
             </a:endParaRPr>
           </a:p>
@@ -8272,7 +8219,7 @@
                 <a:spcPts val="600"/>
               </a:spcBef>
             </a:pPr>
-            <a:endParaRPr lang="en-US" sz="1400" dirty="0"/>
+            <a:endParaRPr lang="en-US" sz="1600" dirty="0"/>
           </a:p>
         </p:txBody>
       </p:sp>
@@ -8438,17 +8385,9 @@
               <a:buNone/>
             </a:pPr>
             <a:r>
-              <a:rPr lang="en-US" sz="1400" b="0" dirty="0"/>
-              <a:t>   Replaces the MTZ ordering variable u_{i,k} from original formulation</a:t>
-            </a:r>
-          </a:p>
-          <a:p>
-            <a:pPr marL="0" indent="0">
-              <a:spcBef>
-                <a:spcPts val="600"/>
-              </a:spcBef>
-              <a:buNone/>
-            </a:pPr>
+              <a:rPr lang="en-US" sz="1400" b="0"/>
+              <a:t>   </a:t>
+            </a:r>
             <a:endParaRPr lang="en-US" sz="1400" b="0" dirty="0"/>
           </a:p>
           <a:p>
@@ -8618,8 +8557,8 @@
           </a:p>
         </p:txBody>
       </p:sp>
-      <mc:AlternateContent xmlns:mc="http://schemas.openxmlformats.org/markup-compatibility/2006">
-        <mc:Choice xmlns:a14="http://schemas.microsoft.com/office/drawing/2010/main" Requires="a14">
+      <mc:AlternateContent xmlns:mc="http://schemas.openxmlformats.org/markup-compatibility/2006" xmlns:a14="http://schemas.microsoft.com/office/drawing/2010/main">
+        <mc:Choice Requires="a14">
           <p:sp>
             <p:nvSpPr>
               <p:cNvPr id="3" name="Content"/>
@@ -8871,7 +8810,31 @@
                           <a:ea typeface="Courier New" panose="02070309020205020404" pitchFamily="49" charset="0"/>
                           <a:cs typeface="Courier New" panose="02070309020205020404" pitchFamily="49" charset="0"/>
                         </a:rPr>
-                        <m:t>=1  ∀ </m:t>
+                        <m:t>=</m:t>
+                      </m:r>
+                      <m:r>
+                        <a:rPr lang="en-US" sz="1400">
+                          <a:solidFill>
+                            <a:srgbClr val="EE0000"/>
+                          </a:solidFill>
+                          <a:effectLst/>
+                          <a:latin typeface="Cambria Math" panose="02040503050406030204" pitchFamily="18" charset="0"/>
+                          <a:ea typeface="Courier New" panose="02070309020205020404" pitchFamily="49" charset="0"/>
+                          <a:cs typeface="Courier New" panose="02070309020205020404" pitchFamily="49" charset="0"/>
+                        </a:rPr>
+                        <m:t>1</m:t>
+                      </m:r>
+                      <m:r>
+                        <a:rPr lang="en-US" sz="1400">
+                          <a:solidFill>
+                            <a:srgbClr val="EE0000"/>
+                          </a:solidFill>
+                          <a:effectLst/>
+                          <a:latin typeface="Cambria Math" panose="02040503050406030204" pitchFamily="18" charset="0"/>
+                          <a:ea typeface="Courier New" panose="02070309020205020404" pitchFamily="49" charset="0"/>
+                          <a:cs typeface="Courier New" panose="02070309020205020404" pitchFamily="49" charset="0"/>
+                        </a:rPr>
+                        <m:t>  ∀ </m:t>
                       </m:r>
                       <m:r>
                         <m:rPr>
@@ -8898,7 +8861,31 @@
                           <a:ea typeface="Courier New" panose="02070309020205020404" pitchFamily="49" charset="0"/>
                           <a:cs typeface="Courier New" panose="02070309020205020404" pitchFamily="49" charset="0"/>
                         </a:rPr>
-                        <m:t>=1,…,</m:t>
+                        <m:t>=</m:t>
+                      </m:r>
+                      <m:r>
+                        <a:rPr lang="en-US" sz="1400">
+                          <a:solidFill>
+                            <a:srgbClr val="EE0000"/>
+                          </a:solidFill>
+                          <a:effectLst/>
+                          <a:latin typeface="Cambria Math" panose="02040503050406030204" pitchFamily="18" charset="0"/>
+                          <a:ea typeface="Courier New" panose="02070309020205020404" pitchFamily="49" charset="0"/>
+                          <a:cs typeface="Courier New" panose="02070309020205020404" pitchFamily="49" charset="0"/>
+                        </a:rPr>
+                        <m:t>1</m:t>
+                      </m:r>
+                      <m:r>
+                        <a:rPr lang="en-US" sz="1400">
+                          <a:solidFill>
+                            <a:srgbClr val="EE0000"/>
+                          </a:solidFill>
+                          <a:effectLst/>
+                          <a:latin typeface="Cambria Math" panose="02040503050406030204" pitchFamily="18" charset="0"/>
+                          <a:ea typeface="Courier New" panose="02070309020205020404" pitchFamily="49" charset="0"/>
+                          <a:cs typeface="Courier New" panose="02070309020205020404" pitchFamily="49" charset="0"/>
+                        </a:rPr>
+                        <m:t>,…,</m:t>
                       </m:r>
                       <m:r>
                         <m:rPr>
@@ -9317,7 +9304,31 @@
                           <a:ea typeface="Courier New" panose="02070309020205020404" pitchFamily="49" charset="0"/>
                           <a:cs typeface="Courier New" panose="02070309020205020404" pitchFamily="49" charset="0"/>
                         </a:rPr>
-                        <m:t>=1  ∀ </m:t>
+                        <m:t>=</m:t>
+                      </m:r>
+                      <m:r>
+                        <a:rPr lang="en-US" sz="1400">
+                          <a:solidFill>
+                            <a:srgbClr val="EE0000"/>
+                          </a:solidFill>
+                          <a:effectLst/>
+                          <a:latin typeface="Cambria Math" panose="02040503050406030204" pitchFamily="18" charset="0"/>
+                          <a:ea typeface="Courier New" panose="02070309020205020404" pitchFamily="49" charset="0"/>
+                          <a:cs typeface="Courier New" panose="02070309020205020404" pitchFamily="49" charset="0"/>
+                        </a:rPr>
+                        <m:t>1</m:t>
+                      </m:r>
+                      <m:r>
+                        <a:rPr lang="en-US" sz="1400">
+                          <a:solidFill>
+                            <a:srgbClr val="EE0000"/>
+                          </a:solidFill>
+                          <a:effectLst/>
+                          <a:latin typeface="Cambria Math" panose="02040503050406030204" pitchFamily="18" charset="0"/>
+                          <a:ea typeface="Courier New" panose="02070309020205020404" pitchFamily="49" charset="0"/>
+                          <a:cs typeface="Courier New" panose="02070309020205020404" pitchFamily="49" charset="0"/>
+                        </a:rPr>
+                        <m:t>  ∀ </m:t>
                       </m:r>
                       <m:r>
                         <m:rPr>
@@ -9486,7 +9497,7 @@
             </p:txBody>
           </p:sp>
         </mc:Choice>
-        <mc:Fallback>
+        <mc:Fallback xmlns="">
           <p:sp>
             <p:nvSpPr>
               <p:cNvPr id="3" name="Content"/>
@@ -9628,16 +9639,12 @@
                 </a:pPr>
                 <a:r>
                   <a:rPr lang="en-US" sz="1400" b="0" dirty="0"/>
-                  <a:t>  ③ Subtour elimination (replaces MTZ constraints)</a:t>
+                  <a:t>  ③ </a:t>
                 </a:r>
-              </a:p>
-              <a:p>
-                <a:pPr marL="0" indent="0">
-                  <a:spcBef>
-                    <a:spcPts val="600"/>
-                  </a:spcBef>
-                  <a:buNone/>
-                </a:pPr>
+                <a:r>
+                  <a:rPr lang="en-US" sz="1400" b="0"/>
+                  <a:t>Subtour elimination</a:t>
+                </a:r>
                 <a:endParaRPr lang="en-US" sz="1400" b="0" dirty="0"/>
               </a:p>
               <a:p>
@@ -9941,7 +9948,31 @@
                               <a:ea typeface="Courier New" panose="02070309020205020404" pitchFamily="49" charset="0"/>
                               <a:cs typeface="Courier New" panose="02070309020205020404" pitchFamily="49" charset="0"/>
                             </a:rPr>
-                            <m:t>=1..</m:t>
+                            <m:t>=</m:t>
+                          </m:r>
+                          <m:r>
+                            <a:rPr lang="en-US" sz="1400">
+                              <a:solidFill>
+                                <a:srgbClr val="EE0000"/>
+                              </a:solidFill>
+                              <a:effectLst/>
+                              <a:latin typeface="Cambria Math" panose="02040503050406030204" pitchFamily="18" charset="0"/>
+                              <a:ea typeface="Courier New" panose="02070309020205020404" pitchFamily="49" charset="0"/>
+                              <a:cs typeface="Courier New" panose="02070309020205020404" pitchFamily="49" charset="0"/>
+                            </a:rPr>
+                            <m:t>1</m:t>
+                          </m:r>
+                          <m:r>
+                            <a:rPr lang="en-US" sz="1400">
+                              <a:solidFill>
+                                <a:srgbClr val="EE0000"/>
+                              </a:solidFill>
+                              <a:effectLst/>
+                              <a:latin typeface="Cambria Math" panose="02040503050406030204" pitchFamily="18" charset="0"/>
+                              <a:ea typeface="Courier New" panose="02070309020205020404" pitchFamily="49" charset="0"/>
+                              <a:cs typeface="Courier New" panose="02070309020205020404" pitchFamily="49" charset="0"/>
+                            </a:rPr>
+                            <m:t>..</m:t>
                           </m:r>
                           <m:r>
                             <m:rPr>
@@ -10538,8 +10569,8 @@
           </a:p>
         </p:txBody>
       </p:sp>
-      <mc:AlternateContent xmlns:mc="http://schemas.openxmlformats.org/markup-compatibility/2006">
-        <mc:Choice xmlns:a14="http://schemas.microsoft.com/office/drawing/2010/main" Requires="a14">
+      <mc:AlternateContent xmlns:mc="http://schemas.openxmlformats.org/markup-compatibility/2006" xmlns:a14="http://schemas.microsoft.com/office/drawing/2010/main">
+        <mc:Choice Requires="a14">
           <p:sp>
             <p:nvSpPr>
               <p:cNvPr id="3" name="Content"/>
@@ -11497,7 +11528,7 @@
             </p:txBody>
           </p:sp>
         </mc:Choice>
-        <mc:Fallback>
+        <mc:Fallback xmlns="">
           <p:sp>
             <p:nvSpPr>
               <p:cNvPr id="3" name="Content"/>
@@ -12925,22 +12956,11 @@
             </a:r>
           </a:p>
           <a:p>
-            <a:pPr marL="457200" indent="-457200">
+            <a:pPr marL="0" indent="0">
               <a:spcBef>
                 <a:spcPts val="300"/>
               </a:spcBef>
               <a:buNone/>
-            </a:pPr>
-            <a:r>
-              <a:rPr lang="en-US" sz="1400" b="0" dirty="0"/>
-              <a:t>AddCircuit improves small-instance speed but does NOT reduce the O(K×N²) variable count.</a:t>
-            </a:r>
-          </a:p>
-          <a:p>
-            <a:pPr>
-              <a:spcBef>
-                <a:spcPts val="300"/>
-              </a:spcBef>
             </a:pPr>
             <a:endParaRPr lang="en-US" sz="1400" dirty="0"/>
           </a:p>
@@ -14988,8 +15008,8 @@
           </a:p>
         </p:txBody>
       </p:sp>
-      <mc:AlternateContent xmlns:mc="http://schemas.openxmlformats.org/markup-compatibility/2006">
-        <mc:Choice xmlns:a14="http://schemas.microsoft.com/office/drawing/2010/main" Requires="a14">
+      <mc:AlternateContent xmlns:mc="http://schemas.openxmlformats.org/markup-compatibility/2006" xmlns:a14="http://schemas.microsoft.com/office/drawing/2010/main">
+        <mc:Choice Requires="a14">
           <p:sp>
             <p:nvSpPr>
               <p:cNvPr id="3" name="Content"/>
@@ -15363,7 +15383,7 @@
             </p:txBody>
           </p:sp>
         </mc:Choice>
-        <mc:Fallback>
+        <mc:Fallback xmlns="">
           <p:sp>
             <p:nvSpPr>
               <p:cNvPr id="3" name="Content"/>
@@ -17356,8 +17376,8 @@
           </a:p>
         </p:txBody>
       </p:sp>
-      <mc:AlternateContent xmlns:mc="http://schemas.openxmlformats.org/markup-compatibility/2006">
-        <mc:Choice xmlns:a14="http://schemas.microsoft.com/office/drawing/2010/main" Requires="a14">
+      <mc:AlternateContent xmlns:mc="http://schemas.openxmlformats.org/markup-compatibility/2006" xmlns:a14="http://schemas.microsoft.com/office/drawing/2010/main">
+        <mc:Choice Requires="a14">
           <p:sp>
             <p:nvSpPr>
               <p:cNvPr id="3" name="Content"/>
@@ -18231,7 +18251,7 @@
             </p:txBody>
           </p:sp>
         </mc:Choice>
-        <mc:Fallback>
+        <mc:Fallback xmlns="">
           <p:sp>
             <p:nvSpPr>
               <p:cNvPr id="3" name="Content"/>

--- a/Report/FundOptG5.pptx
+++ b/Report/FundOptG5.pptx
@@ -5041,7 +5041,31 @@
               <a:rPr lang="en-US" sz="1400" b="0" dirty="0">
                 <a:latin typeface="Courier New"/>
               </a:rPr>
-              <a:t>  key = ( frozenset(unassigned),  tuple(cur_positions) )</a:t>
+              <a:t>  key = ( </a:t>
+            </a:r>
+            <a:r>
+              <a:rPr lang="en-US" sz="1400" b="0" dirty="0" err="1">
+                <a:latin typeface="Courier New"/>
+              </a:rPr>
+              <a:t>frozenset</a:t>
+            </a:r>
+            <a:r>
+              <a:rPr lang="en-US" sz="1400" b="0" dirty="0">
+                <a:latin typeface="Courier New"/>
+              </a:rPr>
+              <a:t>(</a:t>
+            </a:r>
+            <a:r>
+              <a:rPr lang="en-US" sz="1400" dirty="0">
+                <a:latin typeface="Courier New"/>
+              </a:rPr>
+              <a:t>u</a:t>
+            </a:r>
+            <a:r>
+              <a:rPr lang="en-US" sz="1400" b="0" dirty="0">
+                <a:latin typeface="Courier New"/>
+              </a:rPr>
+              <a:t>nvisited),  tuple(cur_positions) )</a:t>
             </a:r>
           </a:p>
           <a:p>
@@ -5190,7 +5214,7 @@
             </a:pPr>
             <a:r>
               <a:rPr lang="en-US" sz="1400" b="1" dirty="0"/>
-              <a:t>Recursive Step: For each unassigned customer</a:t>
+              <a:t>Recursive Step: For each unvisited customer</a:t>
             </a:r>
           </a:p>
           <a:p>
@@ -5201,7 +5225,7 @@
               <a:rPr lang="en-US" sz="1400" b="0" dirty="0">
                 <a:latin typeface="Courier New"/>
               </a:rPr>
-              <a:t>for each customer ∈ unassigned:</a:t>
+              <a:t>for each customer ∈ unvisited:</a:t>
             </a:r>
           </a:p>
           <a:p>
@@ -5373,7 +5397,7 @@
               <a:rPr lang="en-US" sz="1200" b="1" dirty="0">
                 <a:latin typeface="Courier New"/>
               </a:rPr>
-              <a:t>function DFS(unassigned, worker_routes, worker_times, cur_positions)</a:t>
+              <a:t>function DFS(unvisited, worker_routes, worker_times, cur_positions)</a:t>
             </a:r>
           </a:p>
           <a:p>
@@ -5390,7 +5414,31 @@
               <a:rPr lang="en-US" sz="1200" b="0" dirty="0">
                 <a:latin typeface="Courier New"/>
               </a:rPr>
-              <a:t>  key ← (frozenset(unassigned), tuple(cur_positions))</a:t>
+              <a:t>  key ← (</a:t>
+            </a:r>
+            <a:r>
+              <a:rPr lang="en-US" sz="1200" b="0" dirty="0" err="1">
+                <a:latin typeface="Courier New"/>
+              </a:rPr>
+              <a:t>frozenset</a:t>
+            </a:r>
+            <a:r>
+              <a:rPr lang="en-US" sz="1200" b="0" dirty="0">
+                <a:latin typeface="Courier New"/>
+              </a:rPr>
+              <a:t>(</a:t>
+            </a:r>
+            <a:r>
+              <a:rPr lang="en-US" sz="1200" dirty="0">
+                <a:latin typeface="Courier New"/>
+              </a:rPr>
+              <a:t>unvisited</a:t>
+            </a:r>
+            <a:r>
+              <a:rPr lang="en-US" sz="1200" b="0" dirty="0">
+                <a:latin typeface="Courier New"/>
+              </a:rPr>
+              <a:t>), tuple(cur_positions))</a:t>
             </a:r>
           </a:p>
           <a:p>
@@ -5455,7 +5503,19 @@
               <a:rPr lang="en-US" sz="1200" b="0" dirty="0">
                 <a:latin typeface="Courier New"/>
               </a:rPr>
-              <a:t>  if unassigned is empty:</a:t>
+              <a:t>  if </a:t>
+            </a:r>
+            <a:r>
+              <a:rPr lang="en-US" sz="1200" dirty="0">
+                <a:latin typeface="Courier New"/>
+              </a:rPr>
+              <a:t>unvisited</a:t>
+            </a:r>
+            <a:r>
+              <a:rPr lang="en-US" sz="1200" b="0" dirty="0">
+                <a:latin typeface="Courier New"/>
+              </a:rPr>
+              <a:t> is empty:</a:t>
             </a:r>
           </a:p>
           <a:p>
@@ -5588,7 +5648,19 @@
               <a:rPr lang="en-US" sz="1200" b="0" dirty="0">
                 <a:latin typeface="Courier New"/>
               </a:rPr>
-              <a:t>  for each customer ∈ unassigned:</a:t>
+              <a:t>  for each customer ∈ </a:t>
+            </a:r>
+            <a:r>
+              <a:rPr lang="en-US" sz="1200" dirty="0">
+                <a:latin typeface="Courier New"/>
+              </a:rPr>
+              <a:t>unvisited</a:t>
+            </a:r>
+            <a:r>
+              <a:rPr lang="en-US" sz="1200" b="0" dirty="0">
+                <a:latin typeface="Courier New"/>
+              </a:rPr>
+              <a:t>:</a:t>
             </a:r>
           </a:p>
           <a:p>
@@ -5690,7 +5762,19 @@
               <a:rPr lang="en-US" sz="1200" b="0" dirty="0">
                 <a:latin typeface="Courier New"/>
               </a:rPr>
-              <a:t>      DFS(unassigned \ {customer}, worker_routes, worker_times, cur_positions)</a:t>
+              <a:t>      DFS(</a:t>
+            </a:r>
+            <a:r>
+              <a:rPr lang="en-US" sz="1200" dirty="0">
+                <a:latin typeface="Courier New"/>
+              </a:rPr>
+              <a:t>unvisited</a:t>
+            </a:r>
+            <a:r>
+              <a:rPr lang="en-US" sz="1200" b="0" dirty="0">
+                <a:latin typeface="Courier New"/>
+              </a:rPr>
+              <a:t> \ {customer}, worker_routes, worker_times, cur_positions)</a:t>
             </a:r>
           </a:p>
           <a:p>
@@ -6920,31 +7004,7 @@
                           <a:ea typeface="Courier New" panose="02070309020205020404" pitchFamily="49" charset="0"/>
                           <a:cs typeface="Courier New" panose="02070309020205020404" pitchFamily="49" charset="0"/>
                         </a:rPr>
-                        <m:t>=</m:t>
-                      </m:r>
-                      <m:r>
-                        <a:rPr lang="en-US" sz="1400">
-                          <a:solidFill>
-                            <a:srgbClr val="EE0000"/>
-                          </a:solidFill>
-                          <a:effectLst/>
-                          <a:latin typeface="Cambria Math" panose="02040503050406030204" pitchFamily="18" charset="0"/>
-                          <a:ea typeface="Courier New" panose="02070309020205020404" pitchFamily="49" charset="0"/>
-                          <a:cs typeface="Courier New" panose="02070309020205020404" pitchFamily="49" charset="0"/>
-                        </a:rPr>
-                        <m:t>1</m:t>
-                      </m:r>
-                      <m:r>
-                        <a:rPr lang="en-US" sz="1400">
-                          <a:solidFill>
-                            <a:srgbClr val="EE0000"/>
-                          </a:solidFill>
-                          <a:effectLst/>
-                          <a:latin typeface="Cambria Math" panose="02040503050406030204" pitchFamily="18" charset="0"/>
-                          <a:ea typeface="Courier New" panose="02070309020205020404" pitchFamily="49" charset="0"/>
-                          <a:cs typeface="Courier New" panose="02070309020205020404" pitchFamily="49" charset="0"/>
-                        </a:rPr>
-                        <m:t>  ∀ </m:t>
+                        <m:t>=1  ∀ </m:t>
                       </m:r>
                       <m:r>
                         <m:rPr>
@@ -6971,31 +7031,7 @@
                           <a:ea typeface="Courier New" panose="02070309020205020404" pitchFamily="49" charset="0"/>
                           <a:cs typeface="Courier New" panose="02070309020205020404" pitchFamily="49" charset="0"/>
                         </a:rPr>
-                        <m:t>=</m:t>
-                      </m:r>
-                      <m:r>
-                        <a:rPr lang="en-US" sz="1400">
-                          <a:solidFill>
-                            <a:srgbClr val="EE0000"/>
-                          </a:solidFill>
-                          <a:effectLst/>
-                          <a:latin typeface="Cambria Math" panose="02040503050406030204" pitchFamily="18" charset="0"/>
-                          <a:ea typeface="Courier New" panose="02070309020205020404" pitchFamily="49" charset="0"/>
-                          <a:cs typeface="Courier New" panose="02070309020205020404" pitchFamily="49" charset="0"/>
-                        </a:rPr>
-                        <m:t>1</m:t>
-                      </m:r>
-                      <m:r>
-                        <a:rPr lang="en-US" sz="1400">
-                          <a:solidFill>
-                            <a:srgbClr val="EE0000"/>
-                          </a:solidFill>
-                          <a:effectLst/>
-                          <a:latin typeface="Cambria Math" panose="02040503050406030204" pitchFamily="18" charset="0"/>
-                          <a:ea typeface="Courier New" panose="02070309020205020404" pitchFamily="49" charset="0"/>
-                          <a:cs typeface="Courier New" panose="02070309020205020404" pitchFamily="49" charset="0"/>
-                        </a:rPr>
-                        <m:t>,…,</m:t>
+                        <m:t>=1,…,</m:t>
                       </m:r>
                       <m:r>
                         <m:rPr>
@@ -7414,31 +7450,7 @@
                           <a:ea typeface="Courier New" panose="02070309020205020404" pitchFamily="49" charset="0"/>
                           <a:cs typeface="Courier New" panose="02070309020205020404" pitchFamily="49" charset="0"/>
                         </a:rPr>
-                        <m:t>=</m:t>
-                      </m:r>
-                      <m:r>
-                        <a:rPr lang="en-US" sz="1400">
-                          <a:solidFill>
-                            <a:srgbClr val="EE0000"/>
-                          </a:solidFill>
-                          <a:effectLst/>
-                          <a:latin typeface="Cambria Math" panose="02040503050406030204" pitchFamily="18" charset="0"/>
-                          <a:ea typeface="Courier New" panose="02070309020205020404" pitchFamily="49" charset="0"/>
-                          <a:cs typeface="Courier New" panose="02070309020205020404" pitchFamily="49" charset="0"/>
-                        </a:rPr>
-                        <m:t>1</m:t>
-                      </m:r>
-                      <m:r>
-                        <a:rPr lang="en-US" sz="1400">
-                          <a:solidFill>
-                            <a:srgbClr val="EE0000"/>
-                          </a:solidFill>
-                          <a:effectLst/>
-                          <a:latin typeface="Cambria Math" panose="02040503050406030204" pitchFamily="18" charset="0"/>
-                          <a:ea typeface="Courier New" panose="02070309020205020404" pitchFamily="49" charset="0"/>
-                          <a:cs typeface="Courier New" panose="02070309020205020404" pitchFamily="49" charset="0"/>
-                        </a:rPr>
-                        <m:t>  ∀ </m:t>
+                        <m:t>=1  ∀ </m:t>
                       </m:r>
                       <m:r>
                         <m:rPr>
@@ -9356,19 +9368,7 @@
                               <a:ea typeface="DengXian" panose="02010600030101010101" pitchFamily="2" charset="-122"/>
                               <a:cs typeface="Times New Roman" panose="02020603050405020304" pitchFamily="18" charset="0"/>
                             </a:rPr>
-                            <m:t>,</m:t>
-                          </m:r>
-                          <m:r>
-                            <a:rPr lang="en-US" sz="1400" i="1" kern="100">
-                              <a:solidFill>
-                                <a:srgbClr val="FF0000"/>
-                              </a:solidFill>
-                              <a:effectLst/>
-                              <a:latin typeface="Cambria Math" panose="02040503050406030204" pitchFamily="18" charset="0"/>
-                              <a:ea typeface="DengXian" panose="02010600030101010101" pitchFamily="2" charset="-122"/>
-                              <a:cs typeface="Times New Roman" panose="02020603050405020304" pitchFamily="18" charset="0"/>
-                            </a:rPr>
-                            <m:t>0</m:t>
+                            <m:t>,0</m:t>
                           </m:r>
                         </m:sub>
                       </m:sSub>
@@ -11329,7 +11329,12 @@
             <p:ph sz="quarter" idx="13"/>
           </p:nvPr>
         </p:nvSpPr>
-        <p:spPr/>
+        <p:spPr>
+          <a:xfrm>
+            <a:off x="119418" y="1047891"/>
+            <a:ext cx="8905164" cy="5303393"/>
+          </a:xfrm>
+        </p:spPr>
         <p:txBody>
           <a:bodyPr/>
           <a:lstStyle/>
@@ -11338,7 +11343,7 @@
               <a:buNone/>
             </a:pPr>
             <a:r>
-              <a:rPr lang="en-US" sz="2000" b="1" dirty="0"/>
+              <a:rPr lang="en-US" sz="1800" b="1" dirty="0"/>
               <a:t>Classic Greedy Heuristics — Limitation</a:t>
             </a:r>
           </a:p>
@@ -11347,7 +11352,7 @@
               <a:buNone/>
             </a:pPr>
             <a:r>
-              <a:rPr lang="en-US" sz="1800" b="0" dirty="0"/>
+              <a:rPr lang="en-US" sz="1600" b="0" dirty="0"/>
               <a:t>Nearest Neighbor constructs routes sequentially or greedily appends nodes to the end of a route.</a:t>
             </a:r>
           </a:p>
@@ -11356,7 +11361,7 @@
               <a:buNone/>
             </a:pPr>
             <a:r>
-              <a:rPr lang="en-US" sz="1800" b="0" dirty="0"/>
+              <a:rPr lang="en-US" sz="1600" b="0" dirty="0"/>
               <a:t>Problem: remaining nodes at end are often far apart → subsequent routes absorb massive travel times → extreme workload imbalance.</a:t>
             </a:r>
           </a:p>
@@ -11364,14 +11369,14 @@
             <a:pPr marL="0" indent="0">
               <a:buNone/>
             </a:pPr>
-            <a:endParaRPr lang="en-US" sz="1800" b="0" dirty="0"/>
+            <a:endParaRPr lang="en-US" sz="1600" b="0" dirty="0"/>
           </a:p>
           <a:p>
             <a:pPr marL="0" indent="0">
               <a:buNone/>
             </a:pPr>
             <a:r>
-              <a:rPr lang="en-US" sz="2000" b="1" dirty="0"/>
+              <a:rPr lang="en-US" sz="1800" b="1" dirty="0"/>
               <a:t>Sorted Cheapest Insertion — Two Core Modifications</a:t>
             </a:r>
           </a:p>
@@ -11380,7 +11385,7 @@
               <a:buNone/>
             </a:pPr>
             <a:r>
-              <a:rPr lang="en-US" sz="1800" b="1" dirty="0"/>
+              <a:rPr lang="en-US" sz="1600" b="1" dirty="0"/>
               <a:t>① Furthest-First Sort</a:t>
             </a:r>
           </a:p>
@@ -11389,8 +11394,31 @@
               <a:buNone/>
             </a:pPr>
             <a:r>
-              <a:rPr lang="en-US" sz="1800" b="0" dirty="0"/>
-              <a:t>   Prioritizes customers far from depot OR with long maintenance times.</a:t>
+              <a:rPr lang="en-US" sz="1600" b="0" dirty="0"/>
+              <a:t>   Prioritizes customers far from depot (the starting point) or with long maintenance times</a:t>
+            </a:r>
+            <a:r>
+              <a:rPr lang="en-US" sz="1600" dirty="0"/>
+              <a:t> b</a:t>
+            </a:r>
+            <a:r>
+              <a:rPr lang="en-US" sz="1600" b="0" dirty="0"/>
+              <a:t>y routing "difficult" nodes FIRST, reserves flexible nearby nodes for later.</a:t>
+            </a:r>
+          </a:p>
+          <a:p>
+            <a:pPr marL="0" indent="0">
+              <a:buNone/>
+            </a:pPr>
+            <a:endParaRPr lang="en-US" sz="1600" b="0" dirty="0"/>
+          </a:p>
+          <a:p>
+            <a:pPr marL="0" indent="0">
+              <a:buNone/>
+            </a:pPr>
+            <a:r>
+              <a:rPr lang="en-US" sz="1600" b="1" dirty="0"/>
+              <a:t>② Global Cheapest Insertion</a:t>
             </a:r>
           </a:p>
           <a:p>
@@ -11398,23 +11426,8 @@
               <a:buNone/>
             </a:pPr>
             <a:r>
-              <a:rPr lang="en-US" sz="1800" b="0" dirty="0"/>
-              <a:t>   By routing "difficult" nodes FIRST, reserves flexible nearby nodes for later.</a:t>
-            </a:r>
-          </a:p>
-          <a:p>
-            <a:pPr marL="0" indent="0">
-              <a:buNone/>
-            </a:pPr>
-            <a:endParaRPr lang="en-US" sz="1800" b="0" dirty="0"/>
-          </a:p>
-          <a:p>
-            <a:pPr marL="0" indent="0">
-              <a:buNone/>
-            </a:pPr>
-            <a:r>
-              <a:rPr lang="en-US" sz="1800" b="1" dirty="0"/>
-              <a:t>② Global Cheapest Insertion</a:t>
+              <a:rPr lang="en-US" sz="1600" b="0" dirty="0"/>
+              <a:t>   Instead of appending to the end, evaluates inserting the target customer at ANY feasible position within ANY route.</a:t>
             </a:r>
           </a:p>
           <a:p>
@@ -11422,21 +11435,12 @@
               <a:buNone/>
             </a:pPr>
             <a:r>
-              <a:rPr lang="en-US" sz="1800" b="0" dirty="0"/>
-              <a:t>   Instead of appending to the end, evaluates inserting the target customer at ANY feasible position within ANY route.</a:t>
-            </a:r>
-          </a:p>
-          <a:p>
-            <a:pPr marL="457200" indent="-457200">
-              <a:buNone/>
-            </a:pPr>
-            <a:r>
-              <a:rPr lang="en-US" sz="1800" b="0" dirty="0"/>
+              <a:rPr lang="en-US" sz="1600" b="0" dirty="0"/>
               <a:t>   Naturally balances workloads — inserting into a shorter route is computationally favored.</a:t>
             </a:r>
           </a:p>
           <a:p>
-            <a:endParaRPr lang="en-US" dirty="0"/>
+            <a:endParaRPr lang="en-US" sz="2400" dirty="0"/>
           </a:p>
         </p:txBody>
       </p:sp>
@@ -11524,18 +11528,36 @@
             </a:pPr>
             <a:r>
               <a:rPr lang="en-US" sz="1400" b="0" dirty="0"/>
-              <a:t>Initialize K empty routes:</a:t>
-            </a:r>
-          </a:p>
-          <a:p>
-            <a:pPr marL="457200" indent="-457200">
-              <a:buNone/>
-            </a:pPr>
+              <a:t>Initialize K empty technician routes starting and ending at the depot:</a:t>
+            </a:r>
             <a:r>
               <a:rPr lang="en-US" sz="1400" b="0" dirty="0">
                 <a:latin typeface="Courier New"/>
               </a:rPr>
-              <a:t>   R_k = ⟨0, 0⟩   with accumulated workload = 0   for all k ∈ {1, …, K}</a:t>
+              <a:t>  </a:t>
+            </a:r>
+          </a:p>
+          <a:p>
+            <a:pPr marL="0" indent="0" algn="ctr">
+              <a:buNone/>
+            </a:pPr>
+            <a:r>
+              <a:rPr lang="en-US" sz="1400" b="0" dirty="0" err="1">
+                <a:solidFill>
+                  <a:srgbClr val="FF0000"/>
+                </a:solidFill>
+                <a:latin typeface="Courier New"/>
+              </a:rPr>
+              <a:t>R_k</a:t>
+            </a:r>
+            <a:r>
+              <a:rPr lang="en-US" sz="1400" b="0" dirty="0">
+                <a:solidFill>
+                  <a:srgbClr val="FF0000"/>
+                </a:solidFill>
+                <a:latin typeface="Courier New"/>
+              </a:rPr>
+              <a:t> = ⟨0, 0⟩   with initial workload = 0   for all k ∈ {1, …, K}</a:t>
             </a:r>
           </a:p>
           <a:p>
@@ -11561,37 +11583,32 @@
             </a:pPr>
             <a:r>
               <a:rPr lang="en-US" sz="1400" b="0" dirty="0"/>
-              <a:t>Compute priority metric P(u) for each customer u:</a:t>
-            </a:r>
-          </a:p>
-          <a:p>
-            <a:pPr marL="0" indent="0">
-              <a:buNone/>
-            </a:pPr>
-            <a:endParaRPr lang="en-US" sz="1400" b="0" dirty="0"/>
-          </a:p>
-          <a:p>
-            <a:pPr marL="914400" indent="-457200">
-              <a:buNone/>
-            </a:pPr>
-            <a:r>
-              <a:rPr lang="en-US" sz="1400" b="0" dirty="0">
+              <a:t>Compute priority metric P(u) for each customer u (the distance):</a:t>
+            </a:r>
+          </a:p>
+          <a:p>
+            <a:pPr marL="914400" indent="-457200" algn="ctr">
+              <a:buNone/>
+            </a:pPr>
+            <a:r>
+              <a:rPr lang="en-US" sz="1400" dirty="0">
                 <a:solidFill>
                   <a:srgbClr val="C00000"/>
                 </a:solidFill>
-              </a:rPr>
-              <a:t>         P(u)  =  t(0, u)  +  d(u)</a:t>
+                <a:latin typeface="Courier New" panose="02070309020205020404" pitchFamily="49" charset="0"/>
+                <a:cs typeface="Courier New" panose="02070309020205020404" pitchFamily="49" charset="0"/>
+              </a:rPr>
+              <a:t>P(u)  =  t(0, u)  +  d(u)</a:t>
             </a:r>
           </a:p>
           <a:p>
             <a:pPr marL="0" indent="0">
               <a:buNone/>
             </a:pPr>
-            <a:endParaRPr lang="en-US" sz="1400" b="0" dirty="0">
-              <a:solidFill>
-                <a:srgbClr val="C00000"/>
-              </a:solidFill>
-            </a:endParaRPr>
+            <a:r>
+              <a:rPr lang="en-US" sz="1400" b="0" dirty="0"/>
+              <a:t>(where t(0, u) = travel time from depot, d(u) = service duration)</a:t>
+            </a:r>
           </a:p>
           <a:p>
             <a:pPr marL="0" indent="0">
@@ -11599,7 +11616,15 @@
             </a:pPr>
             <a:r>
               <a:rPr lang="en-US" sz="1400" b="0" dirty="0"/>
-              <a:t>Sort the customer set in DESCENDING order of P(u).</a:t>
+              <a:t>Sort the customer set in </a:t>
+            </a:r>
+            <a:r>
+              <a:rPr lang="en-US" sz="1400" b="1" dirty="0"/>
+              <a:t>descending</a:t>
+            </a:r>
+            <a:r>
+              <a:rPr lang="en-US" sz="1400" b="0" dirty="0"/>
+              <a:t> order of P(u).</a:t>
             </a:r>
           </a:p>
           <a:p>
@@ -11618,34 +11643,24 @@
             </a:r>
           </a:p>
           <a:p>
-            <a:pPr marL="457200" indent="-457200">
-              <a:buNone/>
-            </a:pPr>
-            <a:r>
-              <a:rPr lang="en-US" sz="1400" b="0" dirty="0"/>
-              <a:t>Customers that are farthest from depot AND/OR require longest service time are inserted FIRST.</a:t>
-            </a:r>
-          </a:p>
-          <a:p>
-            <a:pPr marL="457200" indent="-457200">
-              <a:buNone/>
-            </a:pPr>
-            <a:r>
-              <a:rPr lang="en-US" sz="1400" b="0" dirty="0"/>
-              <a:t>Forces the algorithm to commit to hard decisions early, when all routes still have flexibility.</a:t>
-            </a:r>
-          </a:p>
-          <a:p>
-            <a:pPr marL="457200" indent="-457200">
-              <a:buNone/>
-            </a:pPr>
-            <a:r>
-              <a:rPr lang="en-US" sz="1400" b="0" dirty="0"/>
-              <a:t>Avoids the "stranded node" problem of classic greedy methods.</a:t>
-            </a:r>
-          </a:p>
-          <a:p>
-            <a:endParaRPr lang="en-US" sz="1400" dirty="0"/>
+            <a:r>
+              <a:rPr lang="en-US" sz="1400" b="1" dirty="0"/>
+              <a:t>Commit Early to Hard Decisions:</a:t>
+            </a:r>
+            <a:r>
+              <a:rPr lang="en-US" sz="1400" dirty="0"/>
+              <a:t> Routing the most distant or time-consuming customers first takes advantage of maximum routing flexibility when routes are empty.</a:t>
+            </a:r>
+          </a:p>
+          <a:p>
+            <a:r>
+              <a:rPr lang="en-US" sz="1400" b="1" dirty="0"/>
+              <a:t>Mitigate the "Isolated Node" Bottleneck: </a:t>
+            </a:r>
+            <a:r>
+              <a:rPr lang="en-US" sz="1400" dirty="0"/>
+              <a:t>Traditional greedy approaches leave distant nodes for last, forcing highly inefficient, long-distance trips at the end. This sorting scheme avoids that bottleneck.</a:t>
+            </a:r>
           </a:p>
         </p:txBody>
       </p:sp>
@@ -11691,21 +11706,13 @@
           <a:p>
             <a:r>
               <a:rPr lang="en-US" sz="2600" dirty="0"/>
-              <a:t>5</a:t>
-            </a:r>
-            <a:r>
-              <a:rPr lang="en-US" sz="2600"/>
-              <a:t>.3 </a:t>
-            </a:r>
-            <a:r>
-              <a:rPr lang="en-US" sz="2600" dirty="0"/>
-              <a:t>Logic — Phase 3: Incremental Cheapest Insertion</a:t>
+              <a:t>5.3 Logic — Phase 3: Sorted Cheapest Insertion</a:t>
             </a:r>
           </a:p>
         </p:txBody>
       </p:sp>
-      <mc:AlternateContent xmlns:mc="http://schemas.openxmlformats.org/markup-compatibility/2006" xmlns:a14="http://schemas.microsoft.com/office/drawing/2010/main">
-        <mc:Choice Requires="a14">
+      <mc:AlternateContent xmlns:mc="http://schemas.openxmlformats.org/markup-compatibility/2006">
+        <mc:Choice xmlns:a14="http://schemas.microsoft.com/office/drawing/2010/main" Requires="a14">
           <p:sp>
             <p:nvSpPr>
               <p:cNvPr id="3" name="Content"/>
@@ -11726,7 +11733,7 @@
                 </a:pPr>
                 <a:r>
                   <a:rPr lang="en-US" sz="1400" b="1" dirty="0"/>
-                  <a:t>For each customer u in the sorted list:</a:t>
+                  <a:t>The insertion step:</a:t>
                 </a:r>
               </a:p>
               <a:p>
@@ -11735,11 +11742,139 @@
                 </a:pPr>
                 <a:r>
                   <a:rPr lang="en-US" sz="1400" b="0" dirty="0"/>
-                  <a:t>Search for optimal route k* and insertion index i* that minimizes the resulting workload.</a:t>
+                  <a:t>For each customer </a:t>
+                </a:r>
+                <a:r>
+                  <a:rPr lang="en-US" sz="1400" b="1" i="1" dirty="0">
+                    <a:latin typeface="Courier New" panose="02070309020205020404" pitchFamily="49" charset="0"/>
+                    <a:cs typeface="Courier New" panose="02070309020205020404" pitchFamily="49" charset="0"/>
+                  </a:rPr>
+                  <a:t>u</a:t>
+                </a:r>
+                <a:r>
+                  <a:rPr lang="en-US" sz="1400" b="0" dirty="0"/>
+                  <a:t> in sorted list, evaluate inserting </a:t>
+                </a:r>
+                <a:r>
+                  <a:rPr lang="en-US" sz="1400" b="1" i="1" dirty="0">
+                    <a:latin typeface="Courier New" panose="02070309020205020404" pitchFamily="49" charset="0"/>
+                    <a:cs typeface="Courier New" panose="02070309020205020404" pitchFamily="49" charset="0"/>
+                  </a:rPr>
+                  <a:t>u</a:t>
+                </a:r>
+                <a:r>
+                  <a:rPr lang="en-US" sz="1400" b="0" dirty="0"/>
+                  <a:t> between consecutive nodes </a:t>
+                </a:r>
+                <a:r>
+                  <a:rPr lang="en-US" sz="1400" b="1" i="1" dirty="0" err="1">
+                    <a:latin typeface="Courier New" panose="02070309020205020404" pitchFamily="49" charset="0"/>
+                    <a:cs typeface="Courier New" panose="02070309020205020404" pitchFamily="49" charset="0"/>
+                  </a:rPr>
+                  <a:t>prev</a:t>
+                </a:r>
+                <a:r>
+                  <a:rPr lang="en-US" sz="1400" b="0" dirty="0"/>
+                  <a:t> and </a:t>
+                </a:r>
+                <a:r>
+                  <a:rPr lang="en-US" sz="1400" b="1" i="1" dirty="0" err="1">
+                    <a:latin typeface="Courier New" panose="02070309020205020404" pitchFamily="49" charset="0"/>
+                    <a:cs typeface="Courier New" panose="02070309020205020404" pitchFamily="49" charset="0"/>
+                  </a:rPr>
+                  <a:t>nxt</a:t>
+                </a:r>
+                <a:r>
+                  <a:rPr lang="en-US" sz="1400" b="1" i="1" dirty="0">
+                    <a:latin typeface="Courier New" panose="02070309020205020404" pitchFamily="49" charset="0"/>
+                    <a:cs typeface="Courier New" panose="02070309020205020404" pitchFamily="49" charset="0"/>
+                  </a:rPr>
+                  <a:t>:</a:t>
                 </a:r>
               </a:p>
               <a:p>
-                <a:pPr marL="0" indent="0">
+                <a:pPr marL="457200" indent="-457200">
+                  <a:buNone/>
+                </a:pPr>
+                <a:endParaRPr lang="en-US" sz="1400" b="1" i="1" dirty="0">
+                  <a:latin typeface="Courier New" panose="02070309020205020404" pitchFamily="49" charset="0"/>
+                  <a:cs typeface="Courier New" panose="02070309020205020404" pitchFamily="49" charset="0"/>
+                </a:endParaRPr>
+              </a:p>
+              <a:p>
+                <a:pPr marL="0" indent="0" algn="ctr">
+                  <a:buNone/>
+                </a:pPr>
+                <a14:m>
+                  <m:oMathPara xmlns:m="http://schemas.openxmlformats.org/officeDocument/2006/math">
+                    <m:oMathParaPr>
+                      <m:jc m:val="centerGroup"/>
+                    </m:oMathParaPr>
+                    <m:oMath xmlns:m="http://schemas.openxmlformats.org/officeDocument/2006/math">
+                      <m:r>
+                        <a:rPr lang="en-US" sz="1600" b="0" i="1" smtClean="0">
+                          <a:latin typeface="Cambria Math" panose="02040503050406030204" pitchFamily="18" charset="0"/>
+                        </a:rPr>
+                        <m:t>𝑝𝑟𝑒𝑣</m:t>
+                      </m:r>
+                      <m:r>
+                        <a:rPr lang="en-US" sz="1600" b="0" i="1" smtClean="0">
+                          <a:latin typeface="Cambria Math" panose="02040503050406030204" pitchFamily="18" charset="0"/>
+                        </a:rPr>
+                        <m:t> →</m:t>
+                      </m:r>
+                      <m:r>
+                        <a:rPr lang="en-US" sz="1600" b="0" i="1" smtClean="0">
+                          <a:latin typeface="Cambria Math" panose="02040503050406030204" pitchFamily="18" charset="0"/>
+                        </a:rPr>
+                        <m:t>𝑛𝑥𝑡</m:t>
+                      </m:r>
+                      <m:r>
+                        <a:rPr lang="en-US" sz="1600" b="0" i="1" smtClean="0">
+                          <a:latin typeface="Cambria Math" panose="02040503050406030204" pitchFamily="18" charset="0"/>
+                        </a:rPr>
+                        <m:t>⇒</m:t>
+                      </m:r>
+                      <m:r>
+                        <a:rPr lang="en-US" sz="1600" b="0" i="1" smtClean="0">
+                          <a:latin typeface="Cambria Math" panose="02040503050406030204" pitchFamily="18" charset="0"/>
+                        </a:rPr>
+                        <m:t>𝑝𝑟𝑒𝑣</m:t>
+                      </m:r>
+                      <m:r>
+                        <a:rPr lang="en-US" sz="1600" b="0" i="1" smtClean="0">
+                          <a:latin typeface="Cambria Math" panose="02040503050406030204" pitchFamily="18" charset="0"/>
+                        </a:rPr>
+                        <m:t> →</m:t>
+                      </m:r>
+                      <m:r>
+                        <a:rPr lang="en-US" sz="1600" b="1" i="1" smtClean="0">
+                          <a:solidFill>
+                            <a:srgbClr val="FF0000"/>
+                          </a:solidFill>
+                          <a:latin typeface="Cambria Math" panose="02040503050406030204" pitchFamily="18" charset="0"/>
+                        </a:rPr>
+                        <m:t>𝒖</m:t>
+                      </m:r>
+                      <m:r>
+                        <a:rPr lang="en-US" sz="1600" b="0" i="1" smtClean="0">
+                          <a:latin typeface="Cambria Math" panose="02040503050406030204" pitchFamily="18" charset="0"/>
+                        </a:rPr>
+                        <m:t> →</m:t>
+                      </m:r>
+                      <m:r>
+                        <a:rPr lang="en-US" sz="1600" b="0" i="1" smtClean="0">
+                          <a:latin typeface="Cambria Math" panose="02040503050406030204" pitchFamily="18" charset="0"/>
+                        </a:rPr>
+                        <m:t>𝑛𝑥𝑡</m:t>
+                      </m:r>
+                    </m:oMath>
+                  </m:oMathPara>
+                </a14:m>
+                <a:endParaRPr lang="en-US" sz="1600" b="0" dirty="0"/>
+              </a:p>
+              <a:p>
+                <a:pPr marL="0" indent="0" algn="ctr">
                   <a:buNone/>
                 </a:pPr>
                 <a:endParaRPr lang="en-US" sz="1400" b="0" dirty="0"/>
@@ -11750,30 +11885,591 @@
                 </a:pPr>
                 <a:r>
                   <a:rPr lang="en-US" sz="1400" b="1" dirty="0"/>
-                  <a:t>Inserting u between consecutive nodes prev = r[i-1] and nxt = r[i]:</a:t>
+                  <a:t>Mathematical Formulation:</a:t>
                 </a:r>
               </a:p>
               <a:p>
-                <a:pPr marL="0" indent="0">
-                  <a:buNone/>
-                </a:pPr>
-                <a:endParaRPr lang="en-US" sz="1400" b="1" dirty="0"/>
+                <a:r>
+                  <a:rPr lang="en-US" sz="1400" dirty="0"/>
+                  <a:t>Workload increment (</a:t>
+                </a:r>
+                <a14:m>
+                  <m:oMath xmlns:m="http://schemas.openxmlformats.org/officeDocument/2006/math">
+                    <m:r>
+                      <a:rPr lang="en-US" sz="1400" i="1" smtClean="0">
+                        <a:latin typeface="Cambria Math" panose="02040503050406030204" pitchFamily="18" charset="0"/>
+                        <a:ea typeface="Cambria Math" panose="02040503050406030204" pitchFamily="18" charset="0"/>
+                      </a:rPr>
+                      <m:t>∆</m:t>
+                    </m:r>
+                    <m:r>
+                      <a:rPr lang="en-US" sz="1400" b="0" i="1" smtClean="0">
+                        <a:latin typeface="Cambria Math" panose="02040503050406030204" pitchFamily="18" charset="0"/>
+                        <a:ea typeface="Cambria Math" panose="02040503050406030204" pitchFamily="18" charset="0"/>
+                      </a:rPr>
+                      <m:t>𝐶𝑜𝑠𝑡</m:t>
+                    </m:r>
+                  </m:oMath>
+                </a14:m>
+                <a:r>
+                  <a:rPr lang="en-US" sz="1400" dirty="0"/>
+                  <a:t>):</a:t>
+                </a:r>
               </a:p>
               <a:p>
-                <a:pPr marL="457200" indent="-457200">
+                <a:pPr marL="457200" indent="-457200" algn="ctr">
                   <a:buNone/>
                 </a:pPr>
                 <a:r>
-                  <a:rPr lang="en-US" sz="1400" b="0" dirty="0">
+                  <a:rPr lang="en-US" sz="1500" b="0" dirty="0">
                     <a:solidFill>
-                      <a:srgbClr val="C00000"/>
+                      <a:srgbClr val="FF0000"/>
                     </a:solidFill>
+                    <a:latin typeface="Courier New" panose="02070309020205020404" pitchFamily="49" charset="0"/>
+                    <a:cs typeface="Courier New" panose="02070309020205020404" pitchFamily="49" charset="0"/>
                   </a:rPr>
-                  <a:t>   ΔCost  =  t(prev, u)  +  d(u)  +  t(u, nxt)  −  t(prev, nxt)</a:t>
+                  <a:t> </a:t>
+                </a:r>
+                <a14:m>
+                  <m:oMath xmlns:m="http://schemas.openxmlformats.org/officeDocument/2006/math">
+                    <m:r>
+                      <a:rPr lang="en-US" sz="1500" i="1">
+                        <a:solidFill>
+                          <a:srgbClr val="FF0000"/>
+                        </a:solidFill>
+                        <a:latin typeface="Cambria Math" panose="02040503050406030204" pitchFamily="18" charset="0"/>
+                        <a:ea typeface="Cambria Math" panose="02040503050406030204" pitchFamily="18" charset="0"/>
+                      </a:rPr>
+                      <m:t>∆</m:t>
+                    </m:r>
+                    <m:r>
+                      <a:rPr lang="en-US" sz="1500" i="1">
+                        <a:solidFill>
+                          <a:srgbClr val="FF0000"/>
+                        </a:solidFill>
+                        <a:latin typeface="Cambria Math" panose="02040503050406030204" pitchFamily="18" charset="0"/>
+                        <a:ea typeface="Cambria Math" panose="02040503050406030204" pitchFamily="18" charset="0"/>
+                      </a:rPr>
+                      <m:t>𝐶𝑜𝑠𝑡</m:t>
+                    </m:r>
+                    <m:r>
+                      <a:rPr lang="en-US" sz="1500" b="0" i="0" smtClean="0">
+                        <a:solidFill>
+                          <a:srgbClr val="FF0000"/>
+                        </a:solidFill>
+                        <a:latin typeface="Cambria Math" panose="02040503050406030204" pitchFamily="18" charset="0"/>
+                        <a:ea typeface="Cambria Math" panose="02040503050406030204" pitchFamily="18" charset="0"/>
+                      </a:rPr>
+                      <m:t>=</m:t>
+                    </m:r>
+                    <m:r>
+                      <m:rPr>
+                        <m:sty m:val="p"/>
+                      </m:rPr>
+                      <a:rPr lang="en-US" sz="1500" b="0" i="0" smtClean="0">
+                        <a:solidFill>
+                          <a:srgbClr val="FF0000"/>
+                        </a:solidFill>
+                        <a:latin typeface="Cambria Math" panose="02040503050406030204" pitchFamily="18" charset="0"/>
+                        <a:ea typeface="Cambria Math" panose="02040503050406030204" pitchFamily="18" charset="0"/>
+                      </a:rPr>
+                      <m:t>t</m:t>
+                    </m:r>
+                    <m:d>
+                      <m:dPr>
+                        <m:ctrlPr>
+                          <a:rPr lang="en-US" sz="1500" b="0" i="0" smtClean="0">
+                            <a:solidFill>
+                              <a:srgbClr val="FF0000"/>
+                            </a:solidFill>
+                            <a:latin typeface="Cambria Math" panose="02040503050406030204" pitchFamily="18" charset="0"/>
+                            <a:ea typeface="Cambria Math" panose="02040503050406030204" pitchFamily="18" charset="0"/>
+                          </a:rPr>
+                        </m:ctrlPr>
+                      </m:dPr>
+                      <m:e>
+                        <m:r>
+                          <m:rPr>
+                            <m:sty m:val="p"/>
+                          </m:rPr>
+                          <a:rPr lang="en-US" sz="1500" b="0" i="0" smtClean="0">
+                            <a:solidFill>
+                              <a:srgbClr val="FF0000"/>
+                            </a:solidFill>
+                            <a:latin typeface="Cambria Math" panose="02040503050406030204" pitchFamily="18" charset="0"/>
+                            <a:ea typeface="Cambria Math" panose="02040503050406030204" pitchFamily="18" charset="0"/>
+                          </a:rPr>
+                          <m:t>prev</m:t>
+                        </m:r>
+                        <m:r>
+                          <a:rPr lang="en-US" sz="1500" b="0" i="0" smtClean="0">
+                            <a:solidFill>
+                              <a:srgbClr val="FF0000"/>
+                            </a:solidFill>
+                            <a:latin typeface="Cambria Math" panose="02040503050406030204" pitchFamily="18" charset="0"/>
+                            <a:ea typeface="Cambria Math" panose="02040503050406030204" pitchFamily="18" charset="0"/>
+                          </a:rPr>
+                          <m:t>, </m:t>
+                        </m:r>
+                        <m:r>
+                          <m:rPr>
+                            <m:sty m:val="p"/>
+                          </m:rPr>
+                          <a:rPr lang="en-US" sz="1500" b="0" i="0" smtClean="0">
+                            <a:solidFill>
+                              <a:srgbClr val="FF0000"/>
+                            </a:solidFill>
+                            <a:latin typeface="Cambria Math" panose="02040503050406030204" pitchFamily="18" charset="0"/>
+                            <a:ea typeface="Cambria Math" panose="02040503050406030204" pitchFamily="18" charset="0"/>
+                          </a:rPr>
+                          <m:t>nxt</m:t>
+                        </m:r>
+                      </m:e>
+                    </m:d>
+                    <m:r>
+                      <a:rPr lang="en-US" sz="1500" b="0" i="0" smtClean="0">
+                        <a:solidFill>
+                          <a:srgbClr val="FF0000"/>
+                        </a:solidFill>
+                        <a:latin typeface="Cambria Math" panose="02040503050406030204" pitchFamily="18" charset="0"/>
+                        <a:ea typeface="Cambria Math" panose="02040503050406030204" pitchFamily="18" charset="0"/>
+                      </a:rPr>
+                      <m:t>+</m:t>
+                    </m:r>
+                    <m:r>
+                      <m:rPr>
+                        <m:sty m:val="p"/>
+                      </m:rPr>
+                      <a:rPr lang="en-US" sz="1500" b="0" i="0" smtClean="0">
+                        <a:solidFill>
+                          <a:srgbClr val="FF0000"/>
+                        </a:solidFill>
+                        <a:latin typeface="Cambria Math" panose="02040503050406030204" pitchFamily="18" charset="0"/>
+                        <a:ea typeface="Cambria Math" panose="02040503050406030204" pitchFamily="18" charset="0"/>
+                      </a:rPr>
+                      <m:t>d</m:t>
+                    </m:r>
+                    <m:d>
+                      <m:dPr>
+                        <m:ctrlPr>
+                          <a:rPr lang="en-US" sz="1500" b="0" i="0" smtClean="0">
+                            <a:solidFill>
+                              <a:srgbClr val="FF0000"/>
+                            </a:solidFill>
+                            <a:latin typeface="Cambria Math" panose="02040503050406030204" pitchFamily="18" charset="0"/>
+                            <a:ea typeface="Cambria Math" panose="02040503050406030204" pitchFamily="18" charset="0"/>
+                          </a:rPr>
+                        </m:ctrlPr>
+                      </m:dPr>
+                      <m:e>
+                        <m:r>
+                          <m:rPr>
+                            <m:sty m:val="p"/>
+                          </m:rPr>
+                          <a:rPr lang="en-US" sz="1500" b="0" i="0" smtClean="0">
+                            <a:solidFill>
+                              <a:srgbClr val="FF0000"/>
+                            </a:solidFill>
+                            <a:latin typeface="Cambria Math" panose="02040503050406030204" pitchFamily="18" charset="0"/>
+                            <a:ea typeface="Cambria Math" panose="02040503050406030204" pitchFamily="18" charset="0"/>
+                          </a:rPr>
+                          <m:t>u</m:t>
+                        </m:r>
+                      </m:e>
+                    </m:d>
+                    <m:r>
+                      <a:rPr lang="en-US" sz="1500" b="0" i="0" smtClean="0">
+                        <a:solidFill>
+                          <a:srgbClr val="FF0000"/>
+                        </a:solidFill>
+                        <a:latin typeface="Cambria Math" panose="02040503050406030204" pitchFamily="18" charset="0"/>
+                        <a:ea typeface="Cambria Math" panose="02040503050406030204" pitchFamily="18" charset="0"/>
+                      </a:rPr>
+                      <m:t>+</m:t>
+                    </m:r>
+                    <m:r>
+                      <m:rPr>
+                        <m:sty m:val="p"/>
+                      </m:rPr>
+                      <a:rPr lang="en-US" sz="1500" b="0" i="0" smtClean="0">
+                        <a:solidFill>
+                          <a:srgbClr val="FF0000"/>
+                        </a:solidFill>
+                        <a:latin typeface="Cambria Math" panose="02040503050406030204" pitchFamily="18" charset="0"/>
+                        <a:ea typeface="Cambria Math" panose="02040503050406030204" pitchFamily="18" charset="0"/>
+                      </a:rPr>
+                      <m:t>t</m:t>
+                    </m:r>
+                    <m:d>
+                      <m:dPr>
+                        <m:ctrlPr>
+                          <a:rPr lang="en-US" sz="1500" b="0" i="0" smtClean="0">
+                            <a:solidFill>
+                              <a:srgbClr val="FF0000"/>
+                            </a:solidFill>
+                            <a:latin typeface="Cambria Math" panose="02040503050406030204" pitchFamily="18" charset="0"/>
+                            <a:ea typeface="Cambria Math" panose="02040503050406030204" pitchFamily="18" charset="0"/>
+                          </a:rPr>
+                        </m:ctrlPr>
+                      </m:dPr>
+                      <m:e>
+                        <m:r>
+                          <m:rPr>
+                            <m:sty m:val="p"/>
+                          </m:rPr>
+                          <a:rPr lang="en-US" sz="1500" b="0" i="0" smtClean="0">
+                            <a:solidFill>
+                              <a:srgbClr val="FF0000"/>
+                            </a:solidFill>
+                            <a:latin typeface="Cambria Math" panose="02040503050406030204" pitchFamily="18" charset="0"/>
+                            <a:ea typeface="Cambria Math" panose="02040503050406030204" pitchFamily="18" charset="0"/>
+                          </a:rPr>
+                          <m:t>u</m:t>
+                        </m:r>
+                        <m:r>
+                          <a:rPr lang="en-US" sz="1500" b="0" i="0" smtClean="0">
+                            <a:solidFill>
+                              <a:srgbClr val="FF0000"/>
+                            </a:solidFill>
+                            <a:latin typeface="Cambria Math" panose="02040503050406030204" pitchFamily="18" charset="0"/>
+                            <a:ea typeface="Cambria Math" panose="02040503050406030204" pitchFamily="18" charset="0"/>
+                          </a:rPr>
+                          <m:t>, </m:t>
+                        </m:r>
+                        <m:r>
+                          <m:rPr>
+                            <m:sty m:val="p"/>
+                          </m:rPr>
+                          <a:rPr lang="en-US" sz="1500" b="0" i="0" smtClean="0">
+                            <a:solidFill>
+                              <a:srgbClr val="FF0000"/>
+                            </a:solidFill>
+                            <a:latin typeface="Cambria Math" panose="02040503050406030204" pitchFamily="18" charset="0"/>
+                            <a:ea typeface="Cambria Math" panose="02040503050406030204" pitchFamily="18" charset="0"/>
+                          </a:rPr>
+                          <m:t>nxt</m:t>
+                        </m:r>
+                      </m:e>
+                    </m:d>
+                    <m:r>
+                      <a:rPr lang="en-US" sz="1500" b="0" i="0" smtClean="0">
+                        <a:solidFill>
+                          <a:srgbClr val="FF0000"/>
+                        </a:solidFill>
+                        <a:latin typeface="Cambria Math" panose="02040503050406030204" pitchFamily="18" charset="0"/>
+                        <a:ea typeface="Cambria Math" panose="02040503050406030204" pitchFamily="18" charset="0"/>
+                      </a:rPr>
+                      <m:t>−</m:t>
+                    </m:r>
+                    <m:r>
+                      <m:rPr>
+                        <m:sty m:val="p"/>
+                      </m:rPr>
+                      <a:rPr lang="en-US" sz="1500" b="0" i="0" smtClean="0">
+                        <a:solidFill>
+                          <a:srgbClr val="FF0000"/>
+                        </a:solidFill>
+                        <a:latin typeface="Cambria Math" panose="02040503050406030204" pitchFamily="18" charset="0"/>
+                        <a:ea typeface="Cambria Math" panose="02040503050406030204" pitchFamily="18" charset="0"/>
+                      </a:rPr>
+                      <m:t>t</m:t>
+                    </m:r>
+                    <m:r>
+                      <a:rPr lang="en-US" sz="1500" b="0" i="0" smtClean="0">
+                        <a:solidFill>
+                          <a:srgbClr val="FF0000"/>
+                        </a:solidFill>
+                        <a:latin typeface="Cambria Math" panose="02040503050406030204" pitchFamily="18" charset="0"/>
+                        <a:ea typeface="Cambria Math" panose="02040503050406030204" pitchFamily="18" charset="0"/>
+                      </a:rPr>
+                      <m:t>(</m:t>
+                    </m:r>
+                    <m:r>
+                      <m:rPr>
+                        <m:sty m:val="p"/>
+                      </m:rPr>
+                      <a:rPr lang="en-US" sz="1500" b="0" i="0" smtClean="0">
+                        <a:solidFill>
+                          <a:srgbClr val="FF0000"/>
+                        </a:solidFill>
+                        <a:latin typeface="Cambria Math" panose="02040503050406030204" pitchFamily="18" charset="0"/>
+                        <a:ea typeface="Cambria Math" panose="02040503050406030204" pitchFamily="18" charset="0"/>
+                      </a:rPr>
+                      <m:t>prev</m:t>
+                    </m:r>
+                    <m:r>
+                      <a:rPr lang="en-US" sz="1500" b="0" i="0" smtClean="0">
+                        <a:solidFill>
+                          <a:srgbClr val="FF0000"/>
+                        </a:solidFill>
+                        <a:latin typeface="Cambria Math" panose="02040503050406030204" pitchFamily="18" charset="0"/>
+                        <a:ea typeface="Cambria Math" panose="02040503050406030204" pitchFamily="18" charset="0"/>
+                      </a:rPr>
+                      <m:t>, </m:t>
+                    </m:r>
+                    <m:r>
+                      <m:rPr>
+                        <m:sty m:val="p"/>
+                      </m:rPr>
+                      <a:rPr lang="en-US" sz="1500" b="0" i="0" smtClean="0">
+                        <a:solidFill>
+                          <a:srgbClr val="FF0000"/>
+                        </a:solidFill>
+                        <a:latin typeface="Cambria Math" panose="02040503050406030204" pitchFamily="18" charset="0"/>
+                        <a:ea typeface="Cambria Math" panose="02040503050406030204" pitchFamily="18" charset="0"/>
+                      </a:rPr>
+                      <m:t>nxt</m:t>
+                    </m:r>
+                    <m:r>
+                      <a:rPr lang="en-US" sz="1500" b="0" i="0" smtClean="0">
+                        <a:solidFill>
+                          <a:srgbClr val="FF0000"/>
+                        </a:solidFill>
+                        <a:latin typeface="Cambria Math" panose="02040503050406030204" pitchFamily="18" charset="0"/>
+                        <a:ea typeface="Cambria Math" panose="02040503050406030204" pitchFamily="18" charset="0"/>
+                      </a:rPr>
+                      <m:t>)</m:t>
+                    </m:r>
+                  </m:oMath>
+                </a14:m>
+                <a:endParaRPr lang="en-US" sz="1500" b="0" dirty="0">
+                  <a:solidFill>
+                    <a:srgbClr val="FF0000"/>
+                  </a:solidFill>
+                  <a:latin typeface="Courier New" panose="02070309020205020404" pitchFamily="49" charset="0"/>
+                  <a:cs typeface="Courier New" panose="02070309020205020404" pitchFamily="49" charset="0"/>
+                </a:endParaRPr>
+              </a:p>
+              <a:p>
+                <a:pPr marL="457200" indent="-457200" algn="ctr">
+                  <a:buNone/>
+                </a:pPr>
+                <a:endParaRPr lang="en-US" sz="1500" b="0" dirty="0">
+                  <a:solidFill>
+                    <a:srgbClr val="FF0000"/>
+                  </a:solidFill>
+                  <a:latin typeface="Courier New" panose="02070309020205020404" pitchFamily="49" charset="0"/>
+                  <a:cs typeface="Courier New" panose="02070309020205020404" pitchFamily="49" charset="0"/>
+                </a:endParaRPr>
+              </a:p>
+              <a:p>
+                <a:r>
+                  <a:rPr lang="en-US" sz="1400" b="0" dirty="0"/>
+                  <a:t>New Route Workload (</a:t>
+                </a:r>
+                <a14:m>
+                  <m:oMath xmlns:m="http://schemas.openxmlformats.org/officeDocument/2006/math">
+                    <m:sSub>
+                      <m:sSubPr>
+                        <m:ctrlPr>
+                          <a:rPr lang="en-US" sz="1400" b="0" i="1" smtClean="0">
+                            <a:latin typeface="Cambria Math" panose="02040503050406030204" pitchFamily="18" charset="0"/>
+                            <a:cs typeface="Courier New" panose="02070309020205020404" pitchFamily="49" charset="0"/>
+                          </a:rPr>
+                        </m:ctrlPr>
+                      </m:sSubPr>
+                      <m:e>
+                        <m:r>
+                          <a:rPr lang="en-US" sz="1400" b="0" i="1" smtClean="0">
+                            <a:latin typeface="Cambria Math" panose="02040503050406030204" pitchFamily="18" charset="0"/>
+                            <a:cs typeface="Courier New" panose="02070309020205020404" pitchFamily="49" charset="0"/>
+                          </a:rPr>
+                          <m:t>𝑊</m:t>
+                        </m:r>
+                      </m:e>
+                      <m:sub>
+                        <m:r>
+                          <a:rPr lang="en-US" sz="1400" b="0" i="1" smtClean="0">
+                            <a:latin typeface="Cambria Math" panose="02040503050406030204" pitchFamily="18" charset="0"/>
+                            <a:cs typeface="Courier New" panose="02070309020205020404" pitchFamily="49" charset="0"/>
+                          </a:rPr>
+                          <m:t>𝑛𝑒𝑤</m:t>
+                        </m:r>
+                      </m:sub>
+                    </m:sSub>
+                  </m:oMath>
+                </a14:m>
+                <a:r>
+                  <a:rPr lang="en-US" sz="1400" b="0" dirty="0"/>
+                  <a:t>): </a:t>
                 </a:r>
               </a:p>
               <a:p>
-                <a:pPr marL="0" indent="0">
+                <a:pPr algn="ctr">
+                  <a:buNone/>
+                </a:pPr>
+                <a14:m>
+                  <m:oMathPara xmlns:m="http://schemas.openxmlformats.org/officeDocument/2006/math">
+                    <m:oMathParaPr>
+                      <m:jc m:val="centerGroup"/>
+                    </m:oMathParaPr>
+                    <m:oMath xmlns:m="http://schemas.openxmlformats.org/officeDocument/2006/math">
+                      <m:sSub>
+                        <m:sSubPr>
+                          <m:ctrlPr>
+                            <a:rPr lang="en-US" sz="1500" i="1" smtClean="0">
+                              <a:solidFill>
+                                <a:srgbClr val="FF0000"/>
+                              </a:solidFill>
+                              <a:latin typeface="Cambria Math" panose="02040503050406030204" pitchFamily="18" charset="0"/>
+                              <a:cs typeface="Courier New" panose="02070309020205020404" pitchFamily="49" charset="0"/>
+                            </a:rPr>
+                          </m:ctrlPr>
+                        </m:sSubPr>
+                        <m:e>
+                          <m:r>
+                            <a:rPr lang="en-US" sz="1500" i="1">
+                              <a:solidFill>
+                                <a:srgbClr val="FF0000"/>
+                              </a:solidFill>
+                              <a:latin typeface="Cambria Math" panose="02040503050406030204" pitchFamily="18" charset="0"/>
+                              <a:cs typeface="Courier New" panose="02070309020205020404" pitchFamily="49" charset="0"/>
+                            </a:rPr>
+                            <m:t>𝑊</m:t>
+                          </m:r>
+                        </m:e>
+                        <m:sub>
+                          <m:r>
+                            <a:rPr lang="en-US" sz="1500" i="1">
+                              <a:solidFill>
+                                <a:srgbClr val="FF0000"/>
+                              </a:solidFill>
+                              <a:latin typeface="Cambria Math" panose="02040503050406030204" pitchFamily="18" charset="0"/>
+                              <a:cs typeface="Courier New" panose="02070309020205020404" pitchFamily="49" charset="0"/>
+                            </a:rPr>
+                            <m:t>𝑛𝑒𝑤</m:t>
+                          </m:r>
+                        </m:sub>
+                      </m:sSub>
+                      <m:r>
+                        <a:rPr lang="en-US" sz="1500" b="0">
+                          <a:solidFill>
+                            <a:srgbClr val="FF0000"/>
+                          </a:solidFill>
+                          <a:effectLst/>
+                          <a:latin typeface="Cambria Math" panose="02040503050406030204" pitchFamily="18" charset="0"/>
+                          <a:ea typeface="Courier New" panose="02070309020205020404" pitchFamily="49" charset="0"/>
+                          <a:cs typeface="Courier New" panose="02070309020205020404" pitchFamily="49" charset="0"/>
+                        </a:rPr>
+                        <m:t>=</m:t>
+                      </m:r>
+                      <m:r>
+                        <a:rPr lang="en-US" sz="1500" b="0" i="1">
+                          <a:solidFill>
+                            <a:srgbClr val="FF0000"/>
+                          </a:solidFill>
+                          <a:effectLst/>
+                          <a:latin typeface="Cambria Math" panose="02040503050406030204" pitchFamily="18" charset="0"/>
+                          <a:ea typeface="Courier New" panose="02070309020205020404" pitchFamily="49" charset="0"/>
+                          <a:cs typeface="Courier New" panose="02070309020205020404" pitchFamily="49" charset="0"/>
+                        </a:rPr>
+                        <m:t>𝑊</m:t>
+                      </m:r>
+                      <m:d>
+                        <m:dPr>
+                          <m:ctrlPr>
+                            <a:rPr lang="en-US" sz="1500" i="1">
+                              <a:solidFill>
+                                <a:srgbClr val="FF0000"/>
+                              </a:solidFill>
+                              <a:effectLst/>
+                              <a:latin typeface="Cambria Math" panose="02040503050406030204" pitchFamily="18" charset="0"/>
+                              <a:ea typeface="Courier New" panose="02070309020205020404" pitchFamily="49" charset="0"/>
+                              <a:cs typeface="Courier New" panose="02070309020205020404" pitchFamily="49" charset="0"/>
+                            </a:rPr>
+                          </m:ctrlPr>
+                        </m:dPr>
+                        <m:e>
+                          <m:sSub>
+                            <m:sSubPr>
+                              <m:ctrlPr>
+                                <a:rPr lang="en-US" sz="1500" i="1">
+                                  <a:solidFill>
+                                    <a:srgbClr val="FF0000"/>
+                                  </a:solidFill>
+                                  <a:effectLst/>
+                                  <a:latin typeface="Cambria Math" panose="02040503050406030204" pitchFamily="18" charset="0"/>
+                                  <a:ea typeface="Courier New" panose="02070309020205020404" pitchFamily="49" charset="0"/>
+                                  <a:cs typeface="Courier New" panose="02070309020205020404" pitchFamily="49" charset="0"/>
+                                </a:rPr>
+                              </m:ctrlPr>
+                            </m:sSubPr>
+                            <m:e>
+                              <m:r>
+                                <a:rPr lang="en-US" sz="1500" b="0" i="1">
+                                  <a:solidFill>
+                                    <a:srgbClr val="FF0000"/>
+                                  </a:solidFill>
+                                  <a:effectLst/>
+                                  <a:latin typeface="Cambria Math" panose="02040503050406030204" pitchFamily="18" charset="0"/>
+                                  <a:ea typeface="Courier New" panose="02070309020205020404" pitchFamily="49" charset="0"/>
+                                  <a:cs typeface="Courier New" panose="02070309020205020404" pitchFamily="49" charset="0"/>
+                                </a:rPr>
+                                <m:t>𝑅</m:t>
+                              </m:r>
+                            </m:e>
+                            <m:sub>
+                              <m:r>
+                                <a:rPr lang="en-US" sz="1500" b="0" i="1">
+                                  <a:solidFill>
+                                    <a:srgbClr val="FF0000"/>
+                                  </a:solidFill>
+                                  <a:effectLst/>
+                                  <a:latin typeface="Cambria Math" panose="02040503050406030204" pitchFamily="18" charset="0"/>
+                                  <a:ea typeface="Courier New" panose="02070309020205020404" pitchFamily="49" charset="0"/>
+                                  <a:cs typeface="Courier New" panose="02070309020205020404" pitchFamily="49" charset="0"/>
+                                </a:rPr>
+                                <m:t>𝑘</m:t>
+                              </m:r>
+                            </m:sub>
+                          </m:sSub>
+                        </m:e>
+                      </m:d>
+                      <m:r>
+                        <a:rPr lang="en-US" sz="1500" b="0">
+                          <a:solidFill>
+                            <a:srgbClr val="FF0000"/>
+                          </a:solidFill>
+                          <a:effectLst/>
+                          <a:latin typeface="Cambria Math" panose="02040503050406030204" pitchFamily="18" charset="0"/>
+                          <a:ea typeface="Courier New" panose="02070309020205020404" pitchFamily="49" charset="0"/>
+                          <a:cs typeface="Courier New" panose="02070309020205020404" pitchFamily="49" charset="0"/>
+                        </a:rPr>
+                        <m:t>+</m:t>
+                      </m:r>
+                      <m:r>
+                        <a:rPr lang="en-US" sz="1500" i="1">
+                          <a:solidFill>
+                            <a:srgbClr val="FF0000"/>
+                          </a:solidFill>
+                          <a:latin typeface="Cambria Math" panose="02040503050406030204" pitchFamily="18" charset="0"/>
+                          <a:ea typeface="Cambria Math" panose="02040503050406030204" pitchFamily="18" charset="0"/>
+                        </a:rPr>
+                        <m:t>∆</m:t>
+                      </m:r>
+                      <m:r>
+                        <a:rPr lang="en-US" sz="1500" i="1">
+                          <a:solidFill>
+                            <a:srgbClr val="FF0000"/>
+                          </a:solidFill>
+                          <a:latin typeface="Cambria Math" panose="02040503050406030204" pitchFamily="18" charset="0"/>
+                          <a:ea typeface="Cambria Math" panose="02040503050406030204" pitchFamily="18" charset="0"/>
+                        </a:rPr>
+                        <m:t>𝐶𝑜𝑠𝑡</m:t>
+                      </m:r>
+                    </m:oMath>
+                  </m:oMathPara>
+                </a14:m>
+                <a:endParaRPr lang="en-US" sz="1500" dirty="0">
+                  <a:solidFill>
+                    <a:srgbClr val="FF0000"/>
+                  </a:solidFill>
+                  <a:latin typeface="Courier New" panose="02070309020205020404" pitchFamily="49" charset="0"/>
+                  <a:cs typeface="Courier New" panose="02070309020205020404" pitchFamily="49" charset="0"/>
+                </a:endParaRPr>
+              </a:p>
+              <a:p>
+                <a:pPr>
                   <a:buNone/>
                 </a:pPr>
                 <a:endParaRPr lang="en-US" sz="1400" b="0" dirty="0">
@@ -11787,227 +12483,61 @@
                   <a:buNone/>
                 </a:pPr>
                 <a:r>
-                  <a:rPr lang="en-US" sz="1400" b="0" dirty="0">
-                    <a:solidFill>
-                      <a:srgbClr val="C00000"/>
-                    </a:solidFill>
-                  </a:rPr>
-                  <a:t>   </a:t>
+                  <a:rPr lang="en-US" sz="1400" b="1" dirty="0"/>
+                  <a:t>Efficiency &amp; Execution:</a:t>
+                </a:r>
+              </a:p>
+              <a:p>
+                <a:pPr marL="0" indent="0">
+                  <a:buNone/>
+                </a:pPr>
+                <a:r>
+                  <a:rPr lang="en-US" sz="1400" b="0" dirty="0"/>
+                  <a:t>• O(1) evaluation: </a:t>
+                </a:r>
+                <a:r>
+                  <a:rPr lang="en-US" sz="1400" dirty="0"/>
+                  <a:t>Calculating </a:t>
                 </a:r>
                 <a14:m>
                   <m:oMath xmlns:m="http://schemas.openxmlformats.org/officeDocument/2006/math">
-                    <m:sSub>
-                      <m:sSubPr>
-                        <m:ctrlPr>
-                          <a:rPr lang="en-US" sz="1400" i="1" smtClean="0">
-                            <a:solidFill>
-                              <a:srgbClr val="EE0000"/>
-                            </a:solidFill>
-                            <a:effectLst/>
-                            <a:latin typeface="Cambria Math" panose="02040503050406030204" pitchFamily="18" charset="0"/>
-                            <a:ea typeface="Courier New" panose="02070309020205020404" pitchFamily="49" charset="0"/>
-                            <a:cs typeface="Courier New" panose="02070309020205020404" pitchFamily="49" charset="0"/>
-                          </a:rPr>
-                        </m:ctrlPr>
-                      </m:sSubPr>
-                      <m:e>
-                        <m:r>
-                          <m:rPr>
-                            <m:sty m:val="p"/>
-                          </m:rPr>
-                          <a:rPr lang="en-US" sz="1400">
-                            <a:solidFill>
-                              <a:srgbClr val="EE0000"/>
-                            </a:solidFill>
-                            <a:effectLst/>
-                            <a:latin typeface="Cambria Math" panose="02040503050406030204" pitchFamily="18" charset="0"/>
-                            <a:ea typeface="Courier New" panose="02070309020205020404" pitchFamily="49" charset="0"/>
-                            <a:cs typeface="Courier New" panose="02070309020205020404" pitchFamily="49" charset="0"/>
-                          </a:rPr>
-                          <m:t>W</m:t>
-                        </m:r>
-                      </m:e>
-                      <m:sub>
-                        <m:r>
-                          <m:rPr>
-                            <m:nor/>
-                          </m:rPr>
-                          <a:rPr lang="en-US" sz="1400">
-                            <a:solidFill>
-                              <a:srgbClr val="EE0000"/>
-                            </a:solidFill>
-                            <a:effectLst/>
-                            <a:latin typeface="Cambria Math" panose="02040503050406030204" pitchFamily="18" charset="0"/>
-                            <a:ea typeface="Courier New" panose="02070309020205020404" pitchFamily="49" charset="0"/>
-                            <a:cs typeface="Courier New" panose="02070309020205020404" pitchFamily="49" charset="0"/>
-                          </a:rPr>
-                          <m:t>new</m:t>
-                        </m:r>
-                      </m:sub>
-                    </m:sSub>
                     <m:r>
-                      <a:rPr lang="en-US" sz="1400">
+                      <a:rPr lang="en-US" sz="1400" i="1" smtClean="0">
                         <a:solidFill>
-                          <a:srgbClr val="EE0000"/>
+                          <a:schemeClr val="tx1"/>
                         </a:solidFill>
-                        <a:effectLst/>
                         <a:latin typeface="Cambria Math" panose="02040503050406030204" pitchFamily="18" charset="0"/>
-                        <a:ea typeface="Courier New" panose="02070309020205020404" pitchFamily="49" charset="0"/>
-                        <a:cs typeface="Courier New" panose="02070309020205020404" pitchFamily="49" charset="0"/>
+                        <a:ea typeface="Cambria Math" panose="02040503050406030204" pitchFamily="18" charset="0"/>
                       </a:rPr>
-                      <m:t>=</m:t>
+                      <m:t>∆</m:t>
                     </m:r>
                     <m:r>
-                      <m:rPr>
-                        <m:sty m:val="p"/>
-                      </m:rPr>
-                      <a:rPr lang="en-US" sz="1400">
-                        <a:solidFill>
-                          <a:srgbClr val="EE0000"/>
-                        </a:solidFill>
-                        <a:effectLst/>
-                        <a:latin typeface="Cambria Math" panose="02040503050406030204" pitchFamily="18" charset="0"/>
-                        <a:ea typeface="Courier New" panose="02070309020205020404" pitchFamily="49" charset="0"/>
-                        <a:cs typeface="Courier New" panose="02070309020205020404" pitchFamily="49" charset="0"/>
-                      </a:rPr>
-                      <m:t>W</m:t>
-                    </m:r>
-                    <m:d>
-                      <m:dPr>
-                        <m:ctrlPr>
-                          <a:rPr lang="en-US" sz="1400" i="1">
-                            <a:solidFill>
-                              <a:srgbClr val="EE0000"/>
-                            </a:solidFill>
-                            <a:effectLst/>
-                            <a:latin typeface="Cambria Math" panose="02040503050406030204" pitchFamily="18" charset="0"/>
-                            <a:ea typeface="Courier New" panose="02070309020205020404" pitchFamily="49" charset="0"/>
-                            <a:cs typeface="Courier New" panose="02070309020205020404" pitchFamily="49" charset="0"/>
-                          </a:rPr>
-                        </m:ctrlPr>
-                      </m:dPr>
-                      <m:e>
-                        <m:sSub>
-                          <m:sSubPr>
-                            <m:ctrlPr>
-                              <a:rPr lang="en-US" sz="1400" i="1">
-                                <a:solidFill>
-                                  <a:srgbClr val="EE0000"/>
-                                </a:solidFill>
-                                <a:effectLst/>
-                                <a:latin typeface="Cambria Math" panose="02040503050406030204" pitchFamily="18" charset="0"/>
-                                <a:ea typeface="Courier New" panose="02070309020205020404" pitchFamily="49" charset="0"/>
-                                <a:cs typeface="Courier New" panose="02070309020205020404" pitchFamily="49" charset="0"/>
-                              </a:rPr>
-                            </m:ctrlPr>
-                          </m:sSubPr>
-                          <m:e>
-                            <m:r>
-                              <m:rPr>
-                                <m:sty m:val="p"/>
-                              </m:rPr>
-                              <a:rPr lang="en-US" sz="1400">
-                                <a:solidFill>
-                                  <a:srgbClr val="EE0000"/>
-                                </a:solidFill>
-                                <a:effectLst/>
-                                <a:latin typeface="Cambria Math" panose="02040503050406030204" pitchFamily="18" charset="0"/>
-                                <a:ea typeface="Courier New" panose="02070309020205020404" pitchFamily="49" charset="0"/>
-                                <a:cs typeface="Courier New" panose="02070309020205020404" pitchFamily="49" charset="0"/>
-                              </a:rPr>
-                              <m:t>R</m:t>
-                            </m:r>
-                          </m:e>
-                          <m:sub>
-                            <m:r>
-                              <m:rPr>
-                                <m:sty m:val="p"/>
-                              </m:rPr>
-                              <a:rPr lang="en-US" sz="1400">
-                                <a:solidFill>
-                                  <a:srgbClr val="EE0000"/>
-                                </a:solidFill>
-                                <a:effectLst/>
-                                <a:latin typeface="Cambria Math" panose="02040503050406030204" pitchFamily="18" charset="0"/>
-                                <a:ea typeface="Courier New" panose="02070309020205020404" pitchFamily="49" charset="0"/>
-                                <a:cs typeface="Courier New" panose="02070309020205020404" pitchFamily="49" charset="0"/>
-                              </a:rPr>
-                              <m:t>k</m:t>
-                            </m:r>
-                          </m:sub>
-                        </m:sSub>
-                      </m:e>
-                    </m:d>
-                    <m:r>
-                      <a:rPr lang="en-US" sz="1400">
-                        <a:solidFill>
-                          <a:srgbClr val="EE0000"/>
-                        </a:solidFill>
-                        <a:effectLst/>
-                        <a:latin typeface="Cambria Math" panose="02040503050406030204" pitchFamily="18" charset="0"/>
-                        <a:ea typeface="Courier New" panose="02070309020205020404" pitchFamily="49" charset="0"/>
-                        <a:cs typeface="Courier New" panose="02070309020205020404" pitchFamily="49" charset="0"/>
-                      </a:rPr>
-                      <m:t>+</m:t>
-                    </m:r>
-                    <m:r>
-                      <m:rPr>
-                        <m:sty m:val="p"/>
-                      </m:rPr>
-                      <a:rPr lang="en-US" sz="1400">
-                        <a:solidFill>
-                          <a:srgbClr val="EE0000"/>
-                        </a:solidFill>
-                        <a:effectLst/>
-                        <a:latin typeface="Cambria Math" panose="02040503050406030204" pitchFamily="18" charset="0"/>
-                        <a:ea typeface="Courier New" panose="02070309020205020404" pitchFamily="49" charset="0"/>
-                        <a:cs typeface="Courier New" panose="02070309020205020404" pitchFamily="49" charset="0"/>
-                      </a:rPr>
-                      <m:t>Δ</m:t>
-                    </m:r>
-                    <m:r>
-                      <m:rPr>
-                        <m:sty m:val="p"/>
-                      </m:rPr>
                       <a:rPr lang="en-US" sz="1400" i="1" smtClean="0">
                         <a:solidFill>
-                          <a:srgbClr val="EE0000"/>
+                          <a:schemeClr val="tx1"/>
                         </a:solidFill>
-                        <a:effectLst/>
                         <a:latin typeface="Cambria Math" panose="02040503050406030204" pitchFamily="18" charset="0"/>
-                        <a:ea typeface="Courier New" panose="02070309020205020404" pitchFamily="49" charset="0"/>
-                        <a:cs typeface="Courier New" panose="02070309020205020404" pitchFamily="49" charset="0"/>
+                        <a:ea typeface="Cambria Math" panose="02040503050406030204" pitchFamily="18" charset="0"/>
                       </a:rPr>
-                      <m:t>c</m:t>
-                    </m:r>
-                    <m:r>
-                      <m:rPr>
-                        <m:nor/>
-                      </m:rPr>
-                      <a:rPr lang="en-US" sz="1400">
-                        <a:solidFill>
-                          <a:srgbClr val="EE0000"/>
-                        </a:solidFill>
-                        <a:effectLst/>
-                        <a:latin typeface="Cambria Math" panose="02040503050406030204" pitchFamily="18" charset="0"/>
-                        <a:ea typeface="Courier New" panose="02070309020205020404" pitchFamily="49" charset="0"/>
-                        <a:cs typeface="Courier New" panose="02070309020205020404" pitchFamily="49" charset="0"/>
-                      </a:rPr>
-                      <m:t>ost</m:t>
+                      <m:t>𝐶𝑜𝑠𝑡</m:t>
                     </m:r>
                   </m:oMath>
                 </a14:m>
-                <a:endParaRPr lang="en-US" sz="1800">
-                  <a:latin typeface="Arial" panose="020B0604020202020204" pitchFamily="34" charset="0"/>
-                </a:endParaRPr>
-              </a:p>
-              <a:p>
-                <a:pPr>
-                  <a:buNone/>
-                </a:pPr>
-                <a:endParaRPr lang="en-US" sz="1400" b="0" dirty="0">
+                <a:r>
+                  <a:rPr lang="en-US" sz="1400" dirty="0">
+                    <a:solidFill>
+                      <a:srgbClr val="FF0000"/>
+                    </a:solidFill>
+                  </a:rPr>
+                  <a:t> </a:t>
+                </a:r>
+                <a:r>
+                  <a:rPr lang="en-US" sz="1400" dirty="0"/>
+                  <a:t>takes constant time per candidate position</a:t>
+                </a:r>
+                <a:endParaRPr lang="en-US" sz="1400" dirty="0">
                   <a:solidFill>
-                    <a:srgbClr val="C00000"/>
+                    <a:srgbClr val="FF0000"/>
                   </a:solidFill>
                 </a:endParaRPr>
               </a:p>
@@ -12017,53 +12547,76 @@
                 </a:pPr>
                 <a:r>
                   <a:rPr lang="en-US" sz="1400" b="0" dirty="0"/>
-                  <a:t>• ΔCost evaluation: O(1) per (route, position) pair</a:t>
+                  <a:t>• Global optimization: Scan all </a:t>
                 </a:r>
-              </a:p>
-              <a:p>
-                <a:pPr marL="0" indent="0">
-                  <a:buNone/>
-                </a:pPr>
+                <a:r>
+                  <a:rPr lang="en-US" sz="1400" b="0" dirty="0">
+                    <a:solidFill>
+                      <a:schemeClr val="tx1"/>
+                    </a:solidFill>
+                  </a:rPr>
+                  <a:t>possible positions across all K routes to find the globally optimal insertion point (k*, </a:t>
+                </a:r>
+                <a:r>
+                  <a:rPr lang="en-US" sz="1400" b="0" dirty="0" err="1">
+                    <a:solidFill>
+                      <a:schemeClr val="tx1"/>
+                    </a:solidFill>
+                  </a:rPr>
+                  <a:t>i</a:t>
+                </a:r>
+                <a:r>
+                  <a:rPr lang="en-US" sz="1400" b="0" dirty="0">
+                    <a:solidFill>
+                      <a:schemeClr val="tx1"/>
+                    </a:solidFill>
+                  </a:rPr>
+                  <a:t>*) that minimizes </a:t>
+                </a:r>
+                <a14:m>
+                  <m:oMath xmlns:m="http://schemas.openxmlformats.org/officeDocument/2006/math">
+                    <m:sSub>
+                      <m:sSubPr>
+                        <m:ctrlPr>
+                          <a:rPr lang="en-US" sz="1400" i="1">
+                            <a:solidFill>
+                              <a:schemeClr val="tx1"/>
+                            </a:solidFill>
+                            <a:latin typeface="Cambria Math" panose="02040503050406030204" pitchFamily="18" charset="0"/>
+                            <a:cs typeface="Courier New" panose="02070309020205020404" pitchFamily="49" charset="0"/>
+                          </a:rPr>
+                        </m:ctrlPr>
+                      </m:sSubPr>
+                      <m:e>
+                        <m:r>
+                          <a:rPr lang="en-US" sz="1400" i="1">
+                            <a:solidFill>
+                              <a:schemeClr val="tx1"/>
+                            </a:solidFill>
+                            <a:latin typeface="Cambria Math" panose="02040503050406030204" pitchFamily="18" charset="0"/>
+                            <a:cs typeface="Courier New" panose="02070309020205020404" pitchFamily="49" charset="0"/>
+                          </a:rPr>
+                          <m:t>𝑊</m:t>
+                        </m:r>
+                      </m:e>
+                      <m:sub>
+                        <m:r>
+                          <a:rPr lang="en-US" sz="1400" i="1">
+                            <a:solidFill>
+                              <a:schemeClr val="tx1"/>
+                            </a:solidFill>
+                            <a:latin typeface="Cambria Math" panose="02040503050406030204" pitchFamily="18" charset="0"/>
+                            <a:cs typeface="Courier New" panose="02070309020205020404" pitchFamily="49" charset="0"/>
+                          </a:rPr>
+                          <m:t>𝑛𝑒𝑤</m:t>
+                        </m:r>
+                      </m:sub>
+                    </m:sSub>
+                  </m:oMath>
+                </a14:m>
                 <a:r>
                   <a:rPr lang="en-US" sz="1400" b="0" dirty="0"/>
-                  <a:t>• ALL positions across ALL routes evaluated → select globally optimal (k*, i*)</a:t>
-                </a:r>
-              </a:p>
-              <a:p>
-                <a:pPr marL="0" indent="0">
-                  <a:buNone/>
-                </a:pPr>
-                <a:r>
-                  <a:rPr lang="en-US" sz="1400" b="0" dirty="0"/>
-                  <a:t>• Insert u into routes[k*] at index i* → update workloads[k*] = W_new</a:t>
-                </a:r>
-              </a:p>
-              <a:p>
-                <a:pPr marL="0" indent="0">
-                  <a:buNone/>
-                </a:pPr>
-                <a:endParaRPr lang="en-US" sz="1400" b="0" dirty="0"/>
-              </a:p>
-              <a:p>
-                <a:pPr marL="0" indent="0">
-                  <a:buNone/>
-                </a:pPr>
-                <a:r>
-                  <a:rPr lang="en-US" sz="1400" b="1" dirty="0">
-                    <a:solidFill>
-                      <a:srgbClr val="C00000"/>
-                    </a:solidFill>
-                  </a:rPr>
-                  <a:t>Key insight:</a:t>
-                </a:r>
-              </a:p>
-              <a:p>
-                <a:pPr marL="457200" indent="-457200">
-                  <a:buNone/>
-                </a:pPr>
-                <a:r>
-                  <a:rPr lang="en-US" sz="1400" b="0" dirty="0"/>
-                  <a:t>Global search across routes naturally balances workloads WITHOUT any explicit load-balancing step.</a:t>
+                  <a:t>.</a:t>
                 </a:r>
               </a:p>
               <a:p>
@@ -12072,7 +12625,7 @@
             </p:txBody>
           </p:sp>
         </mc:Choice>
-        <mc:Fallback xmlns="">
+        <mc:Fallback>
           <p:sp>
             <p:nvSpPr>
               <p:cNvPr id="3" name="Content"/>
@@ -12653,8 +13206,8 @@
           </a:p>
         </p:txBody>
       </p:sp>
-      <mc:AlternateContent xmlns:mc="http://schemas.openxmlformats.org/markup-compatibility/2006" xmlns:a14="http://schemas.microsoft.com/office/drawing/2010/main">
-        <mc:Choice Requires="a14">
+      <mc:AlternateContent xmlns:mc="http://schemas.openxmlformats.org/markup-compatibility/2006">
+        <mc:Choice xmlns:a14="http://schemas.microsoft.com/office/drawing/2010/main" Requires="a14">
           <p:sp>
             <p:nvSpPr>
               <p:cNvPr id="3" name="Content"/>
@@ -12679,27 +13232,42 @@
                 </a:r>
               </a:p>
               <a:p>
-                <a:pPr marL="457200" indent="-457200">
-                  <a:buNone/>
-                </a:pPr>
+                <a:r>
+                  <a:rPr lang="en-US" sz="1400" b="1" dirty="0"/>
+                  <a:t>Sorting phase: </a:t>
+                </a:r>
                 <a:r>
                   <a:rPr lang="en-US" sz="1400" b="0" dirty="0"/>
-                  <a:t>Sorting:           O(N log N)</a:t>
+                  <a:t>O(N log N)</a:t>
                 </a:r>
               </a:p>
               <a:p>
-                <a:pPr marL="457200" indent="-457200">
-                  <a:buNone/>
-                </a:pPr>
+                <a:r>
+                  <a:rPr lang="en-US" sz="1400" b="1" dirty="0"/>
+                  <a:t>Insertion phase:    </a:t>
+                </a:r>
                 <a:r>
                   <a:rPr lang="en-US" sz="1400" b="0" dirty="0"/>
-                  <a:t>Insertion loop:    For customer i, evaluate O(i + K) positions in O(1) each:</a:t>
+                  <a:t>For</a:t>
+                </a:r>
+                <a:r>
+                  <a:rPr lang="en-US" sz="1400" dirty="0"/>
+                  <a:t> the </a:t>
+                </a:r>
+                <a:r>
+                  <a:rPr lang="en-US" sz="1400" dirty="0" err="1"/>
+                  <a:t>i_th</a:t>
+                </a:r>
+                <a:r>
+                  <a:rPr lang="en-US" sz="1400" dirty="0"/>
+                  <a:t> customer</a:t>
+                </a:r>
+                <a:r>
+                  <a:rPr lang="en-US" sz="1400" b="0" dirty="0"/>
+                  <a:t>, the algorithm evaluate O(i + K) positions in O(1) constant time each:</a:t>
                 </a:r>
               </a:p>
               <a:p>
-                <a:pPr marL="0" indent="0">
-                  <a:buNone/>
-                </a:pPr>
                 <a:endParaRPr lang="en-US" sz="1400" b="0" dirty="0"/>
               </a:p>
               <a:p>
@@ -12970,19 +13538,28 @@
                     </m:oMath>
                   </m:oMathPara>
                 </a14:m>
-                <a:endParaRPr lang="en-US" sz="1400" b="0" dirty="0">
+                <a:endParaRPr lang="en-US" sz="1400" dirty="0">
                   <a:solidFill>
                     <a:srgbClr val="C00000"/>
                   </a:solidFill>
                 </a:endParaRPr>
               </a:p>
               <a:p>
-                <a:pPr marL="914400" indent="-457200">
-                  <a:buNone/>
-                </a:pPr>
+                <a:r>
+                  <a:rPr lang="en-US" sz="1400" b="1" dirty="0"/>
+                  <a:t>Scalability in practice: </a:t>
+                </a:r>
                 <a:r>
                   <a:rPr lang="en-US" sz="1400" b="0" dirty="0"/>
-                  <a:t>   For N=1000, K=100:  ≈ 10⁶ + 10⁵ ≈ 1.1 × 10⁶ operations  →  &lt; 0.15 seconds (Python)</a:t>
+                  <a:t>For N=1000, K=100</a:t>
+                </a:r>
+                <a:r>
+                  <a:rPr lang="en-US" sz="1400" dirty="0"/>
+                  <a:t>, this requires only </a:t>
+                </a:r>
+                <a:r>
+                  <a:rPr lang="en-US" sz="1400" b="0" dirty="0"/>
+                  <a:t>≈ 10⁶ + 10⁵ ≈ 1.1 × 10⁶ operations, executing in &lt; 0.15 seconds Python</a:t>
                 </a:r>
               </a:p>
               <a:p>
@@ -13001,63 +13578,33 @@
                 </a:r>
               </a:p>
               <a:p>
-                <a:pPr marL="457200" indent="-457200">
-                  <a:buNone/>
-                </a:pPr>
+                <a:r>
+                  <a:rPr lang="en-US" sz="1400" b="1" dirty="0"/>
+                  <a:t>Travel time matrix: </a:t>
+                </a:r>
                 <a:r>
                   <a:rPr lang="en-US" sz="1400" b="0" dirty="0"/>
-                  <a:t>Travel time matrix: O(N²)  [dominant]        Route structures: O(N + K)</a:t>
+                  <a:t>O(N²)  (dominant memory factor)</a:t>
                 </a:r>
               </a:p>
               <a:p>
-                <a:pPr marL="457200" indent="-457200">
-                  <a:buNone/>
-                </a:pPr>
+                <a:r>
+                  <a:rPr lang="en-US" sz="1400" b="1" dirty="0"/>
+                  <a:t>Route structures: </a:t>
+                </a:r>
                 <a:r>
                   <a:rPr lang="en-US" sz="1400" b="0" dirty="0"/>
-                  <a:t>Total: O(N²)  — fits comfortably within modern memory limits</a:t>
+                  <a:t>O(N + K) to store active routes</a:t>
                 </a:r>
               </a:p>
               <a:p>
-                <a:pPr marL="0" indent="0">
-                  <a:buNone/>
-                </a:pPr>
-                <a:endParaRPr lang="en-US" sz="1400" b="0" dirty="0"/>
-              </a:p>
-              <a:p>
-                <a:pPr marL="0" indent="0">
-                  <a:buNone/>
-                </a:pPr>
                 <a:r>
                   <a:rPr lang="en-US" sz="1400" b="1" dirty="0"/>
-                  <a:t>Solution Quality</a:t>
+                  <a:t>Total: </a:t>
                 </a:r>
-              </a:p>
-              <a:p>
-                <a:pPr marL="457200" indent="-457200">
-                  <a:buNone/>
-                </a:pPr>
                 <a:r>
-                  <a:rPr lang="en-US" sz="1400" b="0" dirty="0"/>
-                  <a:t>Unlike endpoint-only greedy: evaluates INTERNAL route structures at insertion time.</a:t>
-                </a:r>
-              </a:p>
-              <a:p>
-                <a:pPr marL="457200" indent="-457200">
-                  <a:buNone/>
-                </a:pPr>
-                <a:r>
-                  <a:rPr lang="en-US" sz="1400" b="0" dirty="0"/>
-                  <a:t>Sorting "hard" tasks first avoids unbalanced outlier routes.</a:t>
-                </a:r>
-              </a:p>
-              <a:p>
-                <a:pPr marL="457200" indent="-457200">
-                  <a:buNone/>
-                </a:pPr>
-                <a:r>
-                  <a:rPr lang="en-US" sz="1400" b="0" dirty="0"/>
-                  <a:t>Achieves near-optimal results (e.g., workload = 560 on benchmarks) without metaheuristic overhead.</a:t>
+                  <a:rPr lang="en-US" sz="1400" dirty="0"/>
+                  <a:t>O(N²)  </a:t>
                 </a:r>
               </a:p>
               <a:p>
@@ -13066,7 +13613,7 @@
             </p:txBody>
           </p:sp>
         </mc:Choice>
-        <mc:Fallback xmlns="">
+        <mc:Fallback>
           <p:sp>
             <p:nvSpPr>
               <p:cNvPr id="3" name="Content"/>
